--- a/assets/figures-editable/c3-c4/c3-e10.pptx
+++ b/assets/figures-editable/c3-c4/c3-e10.pptx
@@ -3104,8 +3104,8 @@
         </p:nvSpPr>
         <p:spPr>
           <a:xfrm>
-            <a:off x="274320" y="137160"/>
-            <a:ext cx="11612880" cy="365760"/>
+            <a:off x="274320" y="118872"/>
+            <a:ext cx="11612880" cy="340105"/>
           </a:xfrm>
           <a:prstGeom prst="rect">
             <a:avLst/>
@@ -3114,7 +3114,7 @@
           <a:effectLst/>
         </p:spPr>
         <p:txBody>
-          <a:bodyPr wrap="square" lIns="27432" rIns="27432" tIns="18288" bIns="18288" anchor="ctr">
+          <a:bodyPr wrap="none" lIns="18288" rIns="18288" tIns="18288" bIns="18288" anchor="t">
             <a:spAutoFit/>
           </a:bodyPr>
           <a:lstStyle/>
@@ -3125,7 +3125,7 @@
               </a:spcAft>
             </a:pPr>
             <a:r>
-              <a:rPr sz="2100" b="0" i="0">
+              <a:rPr sz="1900" b="1" i="0">
                 <a:solidFill>
                   <a:srgbClr val="8EDBD4"/>
                 </a:solidFill>
@@ -3138,48 +3138,44 @@
       </p:sp>
       <p:cxnSp>
         <p:nvCxnSpPr>
-          <p:cNvPr id="3" name="C3-E10 arrow 1" descr="sci-ppt:o001"/>
+          <p:cNvPr id="3" name="C3-E10 line 1" descr="sci-ppt:o001"/>
           <p:cNvCxnSpPr/>
           <p:nvPr/>
         </p:nvCxnSpPr>
         <p:spPr>
           <a:xfrm>
-            <a:off x="1097280" y="3291840"/>
-            <a:ext cx="9692640" cy="0"/>
+            <a:off x="914400" y="5029200"/>
+            <a:ext cx="6035040" cy="0"/>
           </a:xfrm>
           <a:prstGeom prst="line">
             <a:avLst/>
           </a:prstGeom>
-          <a:ln w="25400">
+          <a:ln w="19050">
             <a:solidFill>
-              <a:srgbClr val="8EDBD4"/>
+              <a:srgbClr val="B4C7D2"/>
             </a:solidFill>
-            <a:headEnd type="none" w="med" len="med"/>
-            <a:tailEnd type="triangle" w="med" len="med"/>
           </a:ln>
           <a:effectLst/>
         </p:spPr>
       </p:cxnSp>
       <p:cxnSp>
         <p:nvCxnSpPr>
-          <p:cNvPr id="4" name="C3-E10 arrow 2" descr="sci-ppt:o002"/>
+          <p:cNvPr id="4" name="C3-E10 line 2" descr="sci-ppt:o002"/>
           <p:cNvCxnSpPr/>
           <p:nvPr/>
         </p:nvCxnSpPr>
         <p:spPr>
-          <a:xfrm flipV="1">
-            <a:off x="1097280" y="822960"/>
-            <a:ext cx="0" cy="2468880"/>
+          <a:xfrm>
+            <a:off x="914400" y="1371600"/>
+            <a:ext cx="0" cy="3657600"/>
           </a:xfrm>
           <a:prstGeom prst="line">
             <a:avLst/>
           </a:prstGeom>
-          <a:ln w="25400">
+          <a:ln w="19050">
             <a:solidFill>
-              <a:srgbClr val="8EDBD4"/>
+              <a:srgbClr val="B4C7D2"/>
             </a:solidFill>
-            <a:headEnd type="none" w="med" len="med"/>
-            <a:tailEnd type="triangle" w="med" len="med"/>
           </a:ln>
           <a:effectLst/>
         </p:spPr>
@@ -3192,15 +3188,15 @@
         </p:nvCxnSpPr>
         <p:spPr>
           <a:xfrm>
-            <a:off x="1097280" y="1097280"/>
-            <a:ext cx="113157" cy="4"/>
+            <a:off x="914400" y="5029200"/>
+            <a:ext cx="0" cy="64008"/>
           </a:xfrm>
           <a:prstGeom prst="line">
             <a:avLst/>
           </a:prstGeom>
-          <a:ln w="25400">
+          <a:ln w="12700">
             <a:solidFill>
-              <a:srgbClr val="8EDBD4"/>
+              <a:srgbClr val="B4C7D2"/>
             </a:solidFill>
           </a:ln>
           <a:effectLst/>
@@ -3214,42 +3210,60 @@
         </p:nvCxnSpPr>
         <p:spPr>
           <a:xfrm>
-            <a:off x="1210437" y="1097284"/>
-            <a:ext cx="113157" cy="30"/>
+            <a:off x="914400" y="1371600"/>
+            <a:ext cx="0" cy="3657600"/>
           </a:xfrm>
           <a:prstGeom prst="line">
             <a:avLst/>
           </a:prstGeom>
-          <a:ln w="25400">
+          <a:ln w="7620">
             <a:solidFill>
-              <a:srgbClr val="8EDBD4"/>
+              <a:srgbClr val="2E4756"/>
             </a:solidFill>
           </a:ln>
           <a:effectLst/>
         </p:spPr>
       </p:cxnSp>
-      <p:cxnSp>
-        <p:nvCxnSpPr>
-          <p:cNvPr id="7" name="C3-E10 line 5" descr="sci-ppt:o005"/>
-          <p:cNvCxnSpPr/>
+      <p:sp>
+        <p:nvSpPr>
+          <p:cNvPr id="7" name="C3-E10 text 5" descr="sci-ppt:o005"/>
+          <p:cNvSpPr txBox="1"/>
           <p:nvPr/>
-        </p:nvCxnSpPr>
-        <p:spPr>
-          <a:xfrm>
-            <a:off x="1323594" y="1097314"/>
-            <a:ext cx="113157" cy="81"/>
-          </a:xfrm>
-          <a:prstGeom prst="line">
-            <a:avLst/>
-          </a:prstGeom>
-          <a:ln w="25400">
-            <a:solidFill>
-              <a:srgbClr val="8EDBD4"/>
-            </a:solidFill>
-          </a:ln>
+        </p:nvSpPr>
+        <p:spPr>
+          <a:xfrm>
+            <a:off x="457200" y="5111496"/>
+            <a:ext cx="914400" cy="208407"/>
+          </a:xfrm>
+          <a:prstGeom prst="rect">
+            <a:avLst/>
+          </a:prstGeom>
+          <a:noFill/>
           <a:effectLst/>
         </p:spPr>
-      </p:cxnSp>
+        <p:txBody>
+          <a:bodyPr wrap="none" lIns="18288" rIns="18288" tIns="18288" bIns="18288" anchor="t">
+            <a:spAutoFit/>
+          </a:bodyPr>
+          <a:lstStyle/>
+          <a:p>
+            <a:pPr algn="ctr">
+              <a:spcAft>
+                <a:spcPts val="0"/>
+              </a:spcAft>
+            </a:pPr>
+            <a:r>
+              <a:rPr sz="1050" b="0" i="0">
+                <a:solidFill>
+                  <a:srgbClr val="B4C7D2"/>
+                </a:solidFill>
+                <a:latin typeface="Arial"/>
+              </a:rPr>
+              <a:t>0</a:t>
+            </a:r>
+          </a:p>
+        </p:txBody>
+      </p:sp>
       <p:cxnSp>
         <p:nvCxnSpPr>
           <p:cNvPr id="8" name="C3-E10 line 6" descr="sci-ppt:o006"/>
@@ -3258,15 +3272,15 @@
         </p:nvCxnSpPr>
         <p:spPr>
           <a:xfrm>
-            <a:off x="1436751" y="1097395"/>
-            <a:ext cx="113156" cy="159"/>
+            <a:off x="1920239" y="5029200"/>
+            <a:ext cx="0" cy="64008"/>
           </a:xfrm>
           <a:prstGeom prst="line">
             <a:avLst/>
           </a:prstGeom>
-          <a:ln w="25400">
+          <a:ln w="12700">
             <a:solidFill>
-              <a:srgbClr val="8EDBD4"/>
+              <a:srgbClr val="B4C7D2"/>
             </a:solidFill>
           </a:ln>
           <a:effectLst/>
@@ -3280,42 +3294,60 @@
         </p:nvCxnSpPr>
         <p:spPr>
           <a:xfrm>
-            <a:off x="1549907" y="1097554"/>
-            <a:ext cx="113158" cy="261"/>
+            <a:off x="1920239" y="1371600"/>
+            <a:ext cx="0" cy="3657600"/>
           </a:xfrm>
           <a:prstGeom prst="line">
             <a:avLst/>
           </a:prstGeom>
-          <a:ln w="25400">
+          <a:ln w="7620">
             <a:solidFill>
-              <a:srgbClr val="8EDBD4"/>
+              <a:srgbClr val="2E4756"/>
             </a:solidFill>
           </a:ln>
           <a:effectLst/>
         </p:spPr>
       </p:cxnSp>
-      <p:cxnSp>
-        <p:nvCxnSpPr>
-          <p:cNvPr id="10" name="C3-E10 line 8" descr="sci-ppt:o008"/>
-          <p:cNvCxnSpPr/>
+      <p:sp>
+        <p:nvSpPr>
+          <p:cNvPr id="10" name="C3-E10 text 8" descr="sci-ppt:o008"/>
+          <p:cNvSpPr txBox="1"/>
           <p:nvPr/>
-        </p:nvCxnSpPr>
-        <p:spPr>
-          <a:xfrm>
-            <a:off x="1663065" y="1097815"/>
-            <a:ext cx="113157" cy="390"/>
-          </a:xfrm>
-          <a:prstGeom prst="line">
-            <a:avLst/>
-          </a:prstGeom>
-          <a:ln w="25400">
-            <a:solidFill>
-              <a:srgbClr val="8EDBD4"/>
-            </a:solidFill>
-          </a:ln>
+        </p:nvSpPr>
+        <p:spPr>
+          <a:xfrm>
+            <a:off x="1463039" y="5111496"/>
+            <a:ext cx="914400" cy="208407"/>
+          </a:xfrm>
+          <a:prstGeom prst="rect">
+            <a:avLst/>
+          </a:prstGeom>
+          <a:noFill/>
           <a:effectLst/>
         </p:spPr>
-      </p:cxnSp>
+        <p:txBody>
+          <a:bodyPr wrap="none" lIns="18288" rIns="18288" tIns="18288" bIns="18288" anchor="t">
+            <a:spAutoFit/>
+          </a:bodyPr>
+          <a:lstStyle/>
+          <a:p>
+            <a:pPr algn="ctr">
+              <a:spcAft>
+                <a:spcPts val="0"/>
+              </a:spcAft>
+            </a:pPr>
+            <a:r>
+              <a:rPr sz="1050" b="0" i="0">
+                <a:solidFill>
+                  <a:srgbClr val="B4C7D2"/>
+                </a:solidFill>
+                <a:latin typeface="Arial"/>
+              </a:rPr>
+              <a:t>1</a:t>
+            </a:r>
+          </a:p>
+        </p:txBody>
+      </p:sp>
       <p:cxnSp>
         <p:nvCxnSpPr>
           <p:cNvPr id="11" name="C3-E10 line 9" descr="sci-ppt:o009"/>
@@ -3324,15 +3356,15 @@
         </p:nvCxnSpPr>
         <p:spPr>
           <a:xfrm>
-            <a:off x="1776222" y="1098205"/>
-            <a:ext cx="113157" cy="545"/>
+            <a:off x="2926079" y="5029200"/>
+            <a:ext cx="0" cy="64008"/>
           </a:xfrm>
           <a:prstGeom prst="line">
             <a:avLst/>
           </a:prstGeom>
-          <a:ln w="25400">
+          <a:ln w="12700">
             <a:solidFill>
-              <a:srgbClr val="8EDBD4"/>
+              <a:srgbClr val="B4C7D2"/>
             </a:solidFill>
           </a:ln>
           <a:effectLst/>
@@ -3346,42 +3378,60 @@
         </p:nvCxnSpPr>
         <p:spPr>
           <a:xfrm>
-            <a:off x="1889379" y="1098750"/>
-            <a:ext cx="113157" cy="724"/>
+            <a:off x="2926079" y="1371600"/>
+            <a:ext cx="0" cy="3657600"/>
           </a:xfrm>
           <a:prstGeom prst="line">
             <a:avLst/>
           </a:prstGeom>
-          <a:ln w="25400">
+          <a:ln w="7620">
             <a:solidFill>
-              <a:srgbClr val="8EDBD4"/>
+              <a:srgbClr val="2E4756"/>
             </a:solidFill>
           </a:ln>
           <a:effectLst/>
         </p:spPr>
       </p:cxnSp>
-      <p:cxnSp>
-        <p:nvCxnSpPr>
-          <p:cNvPr id="13" name="C3-E10 line 11" descr="sci-ppt:o011"/>
-          <p:cNvCxnSpPr/>
+      <p:sp>
+        <p:nvSpPr>
+          <p:cNvPr id="13" name="C3-E10 text 11" descr="sci-ppt:o011"/>
+          <p:cNvSpPr txBox="1"/>
           <p:nvPr/>
-        </p:nvCxnSpPr>
-        <p:spPr>
-          <a:xfrm>
-            <a:off x="2002536" y="1099474"/>
-            <a:ext cx="113157" cy="930"/>
-          </a:xfrm>
-          <a:prstGeom prst="line">
-            <a:avLst/>
-          </a:prstGeom>
-          <a:ln w="25400">
-            <a:solidFill>
-              <a:srgbClr val="8EDBD4"/>
-            </a:solidFill>
-          </a:ln>
+        </p:nvSpPr>
+        <p:spPr>
+          <a:xfrm>
+            <a:off x="2468879" y="5111496"/>
+            <a:ext cx="914400" cy="208407"/>
+          </a:xfrm>
+          <a:prstGeom prst="rect">
+            <a:avLst/>
+          </a:prstGeom>
+          <a:noFill/>
           <a:effectLst/>
         </p:spPr>
-      </p:cxnSp>
+        <p:txBody>
+          <a:bodyPr wrap="none" lIns="18288" rIns="18288" tIns="18288" bIns="18288" anchor="t">
+            <a:spAutoFit/>
+          </a:bodyPr>
+          <a:lstStyle/>
+          <a:p>
+            <a:pPr algn="ctr">
+              <a:spcAft>
+                <a:spcPts val="0"/>
+              </a:spcAft>
+            </a:pPr>
+            <a:r>
+              <a:rPr sz="1050" b="0" i="0">
+                <a:solidFill>
+                  <a:srgbClr val="B4C7D2"/>
+                </a:solidFill>
+                <a:latin typeface="Arial"/>
+              </a:rPr>
+              <a:t>2</a:t>
+            </a:r>
+          </a:p>
+        </p:txBody>
+      </p:sp>
       <p:cxnSp>
         <p:nvCxnSpPr>
           <p:cNvPr id="14" name="C3-E10 line 12" descr="sci-ppt:o012"/>
@@ -3390,15 +3440,15 @@
         </p:nvCxnSpPr>
         <p:spPr>
           <a:xfrm>
-            <a:off x="2115693" y="1100404"/>
-            <a:ext cx="113157" cy="1162"/>
+            <a:off x="3931920" y="5029200"/>
+            <a:ext cx="0" cy="64008"/>
           </a:xfrm>
           <a:prstGeom prst="line">
             <a:avLst/>
           </a:prstGeom>
-          <a:ln w="25400">
+          <a:ln w="12700">
             <a:solidFill>
-              <a:srgbClr val="8EDBD4"/>
+              <a:srgbClr val="B4C7D2"/>
             </a:solidFill>
           </a:ln>
           <a:effectLst/>
@@ -3412,42 +3462,60 @@
         </p:nvCxnSpPr>
         <p:spPr>
           <a:xfrm>
-            <a:off x="2228850" y="1101566"/>
-            <a:ext cx="113157" cy="1418"/>
+            <a:off x="3931920" y="1371600"/>
+            <a:ext cx="0" cy="3657600"/>
           </a:xfrm>
           <a:prstGeom prst="line">
             <a:avLst/>
           </a:prstGeom>
-          <a:ln w="25400">
+          <a:ln w="7620">
             <a:solidFill>
-              <a:srgbClr val="8EDBD4"/>
+              <a:srgbClr val="2E4756"/>
             </a:solidFill>
           </a:ln>
           <a:effectLst/>
         </p:spPr>
       </p:cxnSp>
-      <p:cxnSp>
-        <p:nvCxnSpPr>
-          <p:cNvPr id="16" name="C3-E10 line 14" descr="sci-ppt:o014"/>
-          <p:cNvCxnSpPr/>
+      <p:sp>
+        <p:nvSpPr>
+          <p:cNvPr id="16" name="C3-E10 text 14" descr="sci-ppt:o014"/>
+          <p:cNvSpPr txBox="1"/>
           <p:nvPr/>
-        </p:nvCxnSpPr>
-        <p:spPr>
-          <a:xfrm>
-            <a:off x="2342007" y="1102984"/>
-            <a:ext cx="113157" cy="1702"/>
-          </a:xfrm>
-          <a:prstGeom prst="line">
-            <a:avLst/>
-          </a:prstGeom>
-          <a:ln w="25400">
-            <a:solidFill>
-              <a:srgbClr val="8EDBD4"/>
-            </a:solidFill>
-          </a:ln>
+        </p:nvSpPr>
+        <p:spPr>
+          <a:xfrm>
+            <a:off x="3474720" y="5111496"/>
+            <a:ext cx="914400" cy="208407"/>
+          </a:xfrm>
+          <a:prstGeom prst="rect">
+            <a:avLst/>
+          </a:prstGeom>
+          <a:noFill/>
           <a:effectLst/>
         </p:spPr>
-      </p:cxnSp>
+        <p:txBody>
+          <a:bodyPr wrap="none" lIns="18288" rIns="18288" tIns="18288" bIns="18288" anchor="t">
+            <a:spAutoFit/>
+          </a:bodyPr>
+          <a:lstStyle/>
+          <a:p>
+            <a:pPr algn="ctr">
+              <a:spcAft>
+                <a:spcPts val="0"/>
+              </a:spcAft>
+            </a:pPr>
+            <a:r>
+              <a:rPr sz="1050" b="0" i="0">
+                <a:solidFill>
+                  <a:srgbClr val="B4C7D2"/>
+                </a:solidFill>
+                <a:latin typeface="Arial"/>
+              </a:rPr>
+              <a:t>3</a:t>
+            </a:r>
+          </a:p>
+        </p:txBody>
+      </p:sp>
       <p:cxnSp>
         <p:nvCxnSpPr>
           <p:cNvPr id="17" name="C3-E10 line 15" descr="sci-ppt:o015"/>
@@ -3456,15 +3524,15 @@
         </p:nvCxnSpPr>
         <p:spPr>
           <a:xfrm>
-            <a:off x="2455164" y="1104686"/>
-            <a:ext cx="113157" cy="2010"/>
+            <a:off x="4937759" y="5029200"/>
+            <a:ext cx="0" cy="64008"/>
           </a:xfrm>
           <a:prstGeom prst="line">
             <a:avLst/>
           </a:prstGeom>
-          <a:ln w="25400">
+          <a:ln w="12700">
             <a:solidFill>
-              <a:srgbClr val="8EDBD4"/>
+              <a:srgbClr val="B4C7D2"/>
             </a:solidFill>
           </a:ln>
           <a:effectLst/>
@@ -3478,42 +3546,60 @@
         </p:nvCxnSpPr>
         <p:spPr>
           <a:xfrm>
-            <a:off x="2568321" y="1106696"/>
-            <a:ext cx="113157" cy="2345"/>
+            <a:off x="4937759" y="1371600"/>
+            <a:ext cx="0" cy="3657600"/>
           </a:xfrm>
           <a:prstGeom prst="line">
             <a:avLst/>
           </a:prstGeom>
-          <a:ln w="25400">
+          <a:ln w="7620">
             <a:solidFill>
-              <a:srgbClr val="8EDBD4"/>
+              <a:srgbClr val="2E4756"/>
             </a:solidFill>
           </a:ln>
           <a:effectLst/>
         </p:spPr>
       </p:cxnSp>
-      <p:cxnSp>
-        <p:nvCxnSpPr>
-          <p:cNvPr id="19" name="C3-E10 line 17" descr="sci-ppt:o017"/>
-          <p:cNvCxnSpPr/>
+      <p:sp>
+        <p:nvSpPr>
+          <p:cNvPr id="19" name="C3-E10 text 17" descr="sci-ppt:o017"/>
+          <p:cNvSpPr txBox="1"/>
           <p:nvPr/>
-        </p:nvCxnSpPr>
-        <p:spPr>
-          <a:xfrm>
-            <a:off x="2681478" y="1109041"/>
-            <a:ext cx="113157" cy="2705"/>
-          </a:xfrm>
-          <a:prstGeom prst="line">
-            <a:avLst/>
-          </a:prstGeom>
-          <a:ln w="25400">
-            <a:solidFill>
-              <a:srgbClr val="8EDBD4"/>
-            </a:solidFill>
-          </a:ln>
+        </p:nvSpPr>
+        <p:spPr>
+          <a:xfrm>
+            <a:off x="4480559" y="5111496"/>
+            <a:ext cx="914400" cy="208407"/>
+          </a:xfrm>
+          <a:prstGeom prst="rect">
+            <a:avLst/>
+          </a:prstGeom>
+          <a:noFill/>
           <a:effectLst/>
         </p:spPr>
-      </p:cxnSp>
+        <p:txBody>
+          <a:bodyPr wrap="none" lIns="18288" rIns="18288" tIns="18288" bIns="18288" anchor="t">
+            <a:spAutoFit/>
+          </a:bodyPr>
+          <a:lstStyle/>
+          <a:p>
+            <a:pPr algn="ctr">
+              <a:spcAft>
+                <a:spcPts val="0"/>
+              </a:spcAft>
+            </a:pPr>
+            <a:r>
+              <a:rPr sz="1050" b="0" i="0">
+                <a:solidFill>
+                  <a:srgbClr val="B4C7D2"/>
+                </a:solidFill>
+                <a:latin typeface="Arial"/>
+              </a:rPr>
+              <a:t>4</a:t>
+            </a:r>
+          </a:p>
+        </p:txBody>
+      </p:sp>
       <p:cxnSp>
         <p:nvCxnSpPr>
           <p:cNvPr id="20" name="C3-E10 line 18" descr="sci-ppt:o018"/>
@@ -3522,15 +3608,15 @@
         </p:nvCxnSpPr>
         <p:spPr>
           <a:xfrm>
-            <a:off x="2794635" y="1111746"/>
-            <a:ext cx="113156" cy="3090"/>
+            <a:off x="5943600" y="5029200"/>
+            <a:ext cx="0" cy="64008"/>
           </a:xfrm>
           <a:prstGeom prst="line">
             <a:avLst/>
           </a:prstGeom>
-          <a:ln w="25400">
+          <a:ln w="12700">
             <a:solidFill>
-              <a:srgbClr val="8EDBD4"/>
+              <a:srgbClr val="B4C7D2"/>
             </a:solidFill>
           </a:ln>
           <a:effectLst/>
@@ -3544,42 +3630,60 @@
         </p:nvCxnSpPr>
         <p:spPr>
           <a:xfrm>
-            <a:off x="2907791" y="1114836"/>
-            <a:ext cx="113158" cy="3502"/>
+            <a:off x="5943600" y="1371600"/>
+            <a:ext cx="0" cy="3657600"/>
           </a:xfrm>
           <a:prstGeom prst="line">
             <a:avLst/>
           </a:prstGeom>
-          <a:ln w="25400">
+          <a:ln w="7620">
             <a:solidFill>
-              <a:srgbClr val="8EDBD4"/>
+              <a:srgbClr val="2E4756"/>
             </a:solidFill>
           </a:ln>
           <a:effectLst/>
         </p:spPr>
       </p:cxnSp>
-      <p:cxnSp>
-        <p:nvCxnSpPr>
-          <p:cNvPr id="22" name="C3-E10 line 20" descr="sci-ppt:o020"/>
-          <p:cNvCxnSpPr/>
+      <p:sp>
+        <p:nvSpPr>
+          <p:cNvPr id="22" name="C3-E10 text 20" descr="sci-ppt:o020"/>
+          <p:cNvSpPr txBox="1"/>
           <p:nvPr/>
-        </p:nvCxnSpPr>
-        <p:spPr>
-          <a:xfrm>
-            <a:off x="3020949" y="1118338"/>
-            <a:ext cx="113157" cy="3939"/>
-          </a:xfrm>
-          <a:prstGeom prst="line">
-            <a:avLst/>
-          </a:prstGeom>
-          <a:ln w="25400">
-            <a:solidFill>
-              <a:srgbClr val="8EDBD4"/>
-            </a:solidFill>
-          </a:ln>
+        </p:nvSpPr>
+        <p:spPr>
+          <a:xfrm>
+            <a:off x="5486400" y="5111496"/>
+            <a:ext cx="914400" cy="208407"/>
+          </a:xfrm>
+          <a:prstGeom prst="rect">
+            <a:avLst/>
+          </a:prstGeom>
+          <a:noFill/>
           <a:effectLst/>
         </p:spPr>
-      </p:cxnSp>
+        <p:txBody>
+          <a:bodyPr wrap="none" lIns="18288" rIns="18288" tIns="18288" bIns="18288" anchor="t">
+            <a:spAutoFit/>
+          </a:bodyPr>
+          <a:lstStyle/>
+          <a:p>
+            <a:pPr algn="ctr">
+              <a:spcAft>
+                <a:spcPts val="0"/>
+              </a:spcAft>
+            </a:pPr>
+            <a:r>
+              <a:rPr sz="1050" b="0" i="0">
+                <a:solidFill>
+                  <a:srgbClr val="B4C7D2"/>
+                </a:solidFill>
+                <a:latin typeface="Arial"/>
+              </a:rPr>
+              <a:t>5</a:t>
+            </a:r>
+          </a:p>
+        </p:txBody>
+      </p:sp>
       <p:cxnSp>
         <p:nvCxnSpPr>
           <p:cNvPr id="23" name="C3-E10 line 21" descr="sci-ppt:o021"/>
@@ -3588,15 +3692,15 @@
         </p:nvCxnSpPr>
         <p:spPr>
           <a:xfrm>
-            <a:off x="3134106" y="1122277"/>
-            <a:ext cx="113156" cy="4402"/>
+            <a:off x="6949440" y="5029200"/>
+            <a:ext cx="0" cy="64008"/>
           </a:xfrm>
           <a:prstGeom prst="line">
             <a:avLst/>
           </a:prstGeom>
-          <a:ln w="25400">
+          <a:ln w="12700">
             <a:solidFill>
-              <a:srgbClr val="8EDBD4"/>
+              <a:srgbClr val="B4C7D2"/>
             </a:solidFill>
           </a:ln>
           <a:effectLst/>
@@ -3610,42 +3714,60 @@
         </p:nvCxnSpPr>
         <p:spPr>
           <a:xfrm>
-            <a:off x="3247262" y="1126679"/>
-            <a:ext cx="113158" cy="4891"/>
+            <a:off x="6949440" y="1371600"/>
+            <a:ext cx="0" cy="3657600"/>
           </a:xfrm>
           <a:prstGeom prst="line">
             <a:avLst/>
           </a:prstGeom>
-          <a:ln w="25400">
+          <a:ln w="7620">
             <a:solidFill>
-              <a:srgbClr val="8EDBD4"/>
+              <a:srgbClr val="2E4756"/>
             </a:solidFill>
           </a:ln>
           <a:effectLst/>
         </p:spPr>
       </p:cxnSp>
-      <p:cxnSp>
-        <p:nvCxnSpPr>
-          <p:cNvPr id="25" name="C3-E10 line 23" descr="sci-ppt:o023"/>
-          <p:cNvCxnSpPr/>
+      <p:sp>
+        <p:nvSpPr>
+          <p:cNvPr id="25" name="C3-E10 text 23" descr="sci-ppt:o023"/>
+          <p:cNvSpPr txBox="1"/>
           <p:nvPr/>
-        </p:nvCxnSpPr>
-        <p:spPr>
-          <a:xfrm>
-            <a:off x="3360420" y="1131570"/>
-            <a:ext cx="113157" cy="5404"/>
-          </a:xfrm>
-          <a:prstGeom prst="line">
-            <a:avLst/>
-          </a:prstGeom>
-          <a:ln w="25400">
-            <a:solidFill>
-              <a:srgbClr val="8EDBD4"/>
-            </a:solidFill>
-          </a:ln>
+        </p:nvSpPr>
+        <p:spPr>
+          <a:xfrm>
+            <a:off x="6492240" y="5111496"/>
+            <a:ext cx="914400" cy="208407"/>
+          </a:xfrm>
+          <a:prstGeom prst="rect">
+            <a:avLst/>
+          </a:prstGeom>
+          <a:noFill/>
           <a:effectLst/>
         </p:spPr>
-      </p:cxnSp>
+        <p:txBody>
+          <a:bodyPr wrap="none" lIns="18288" rIns="18288" tIns="18288" bIns="18288" anchor="t">
+            <a:spAutoFit/>
+          </a:bodyPr>
+          <a:lstStyle/>
+          <a:p>
+            <a:pPr algn="ctr">
+              <a:spcAft>
+                <a:spcPts val="0"/>
+              </a:spcAft>
+            </a:pPr>
+            <a:r>
+              <a:rPr sz="1050" b="0" i="0">
+                <a:solidFill>
+                  <a:srgbClr val="B4C7D2"/>
+                </a:solidFill>
+                <a:latin typeface="Arial"/>
+              </a:rPr>
+              <a:t>6</a:t>
+            </a:r>
+          </a:p>
+        </p:txBody>
+      </p:sp>
       <p:cxnSp>
         <p:nvCxnSpPr>
           <p:cNvPr id="26" name="C3-E10 line 24" descr="sci-ppt:o024"/>
@@ -3654,15 +3776,15 @@
         </p:nvCxnSpPr>
         <p:spPr>
           <a:xfrm>
-            <a:off x="3473577" y="1136974"/>
-            <a:ext cx="113157" cy="5945"/>
+            <a:off x="850392" y="4506685"/>
+            <a:ext cx="64008" cy="0"/>
           </a:xfrm>
           <a:prstGeom prst="line">
             <a:avLst/>
           </a:prstGeom>
-          <a:ln w="25400">
+          <a:ln w="12700">
             <a:solidFill>
-              <a:srgbClr val="8EDBD4"/>
+              <a:srgbClr val="B4C7D2"/>
             </a:solidFill>
           </a:ln>
           <a:effectLst/>
@@ -3676,42 +3798,60 @@
         </p:nvCxnSpPr>
         <p:spPr>
           <a:xfrm>
-            <a:off x="3586734" y="1142919"/>
-            <a:ext cx="113157" cy="6511"/>
+            <a:off x="914400" y="4506685"/>
+            <a:ext cx="6035040" cy="0"/>
           </a:xfrm>
           <a:prstGeom prst="line">
             <a:avLst/>
           </a:prstGeom>
-          <a:ln w="25400">
+          <a:ln w="7620">
             <a:solidFill>
-              <a:srgbClr val="8EDBD4"/>
+              <a:srgbClr val="2E4756"/>
             </a:solidFill>
           </a:ln>
           <a:effectLst/>
         </p:spPr>
       </p:cxnSp>
-      <p:cxnSp>
-        <p:nvCxnSpPr>
-          <p:cNvPr id="28" name="C3-E10 line 26" descr="sci-ppt:o026"/>
-          <p:cNvCxnSpPr/>
+      <p:sp>
+        <p:nvSpPr>
+          <p:cNvPr id="28" name="C3-E10 text 26" descr="sci-ppt:o026"/>
+          <p:cNvSpPr txBox="1"/>
           <p:nvPr/>
-        </p:nvCxnSpPr>
-        <p:spPr>
-          <a:xfrm>
-            <a:off x="3699891" y="1149430"/>
-            <a:ext cx="113157" cy="7103"/>
-          </a:xfrm>
-          <a:prstGeom prst="line">
-            <a:avLst/>
-          </a:prstGeom>
-          <a:ln w="25400">
-            <a:solidFill>
-              <a:srgbClr val="8EDBD4"/>
-            </a:solidFill>
-          </a:ln>
+        </p:nvSpPr>
+        <p:spPr>
+          <a:xfrm>
+            <a:off x="45720" y="4424389"/>
+            <a:ext cx="777240" cy="208407"/>
+          </a:xfrm>
+          <a:prstGeom prst="rect">
+            <a:avLst/>
+          </a:prstGeom>
+          <a:noFill/>
           <a:effectLst/>
         </p:spPr>
-      </p:cxnSp>
+        <p:txBody>
+          <a:bodyPr wrap="none" lIns="18288" rIns="18288" tIns="18288" bIns="18288" anchor="t">
+            <a:spAutoFit/>
+          </a:bodyPr>
+          <a:lstStyle/>
+          <a:p>
+            <a:pPr algn="r">
+              <a:spcAft>
+                <a:spcPts val="0"/>
+              </a:spcAft>
+            </a:pPr>
+            <a:r>
+              <a:rPr sz="1050" b="0" i="0">
+                <a:solidFill>
+                  <a:srgbClr val="B4C7D2"/>
+                </a:solidFill>
+                <a:latin typeface="Arial"/>
+              </a:rPr>
+              <a:t>1.0</a:t>
+            </a:r>
+          </a:p>
+        </p:txBody>
+      </p:sp>
       <p:cxnSp>
         <p:nvCxnSpPr>
           <p:cNvPr id="29" name="C3-E10 line 27" descr="sci-ppt:o027"/>
@@ -3720,15 +3860,15 @@
         </p:nvCxnSpPr>
         <p:spPr>
           <a:xfrm>
-            <a:off x="3813048" y="1156533"/>
-            <a:ext cx="113157" cy="7719"/>
+            <a:off x="850392" y="3200400"/>
+            <a:ext cx="64008" cy="0"/>
           </a:xfrm>
           <a:prstGeom prst="line">
             <a:avLst/>
           </a:prstGeom>
-          <a:ln w="25400">
+          <a:ln w="12700">
             <a:solidFill>
-              <a:srgbClr val="8EDBD4"/>
+              <a:srgbClr val="B4C7D2"/>
             </a:solidFill>
           </a:ln>
           <a:effectLst/>
@@ -3742,42 +3882,60 @@
         </p:nvCxnSpPr>
         <p:spPr>
           <a:xfrm>
-            <a:off x="3926205" y="1164252"/>
-            <a:ext cx="113157" cy="8363"/>
+            <a:off x="914400" y="3200400"/>
+            <a:ext cx="6035040" cy="0"/>
           </a:xfrm>
           <a:prstGeom prst="line">
             <a:avLst/>
           </a:prstGeom>
-          <a:ln w="25400">
+          <a:ln w="7620">
             <a:solidFill>
-              <a:srgbClr val="8EDBD4"/>
+              <a:srgbClr val="2E4756"/>
             </a:solidFill>
           </a:ln>
           <a:effectLst/>
         </p:spPr>
       </p:cxnSp>
-      <p:cxnSp>
-        <p:nvCxnSpPr>
-          <p:cNvPr id="31" name="C3-E10 line 29" descr="sci-ppt:o029"/>
-          <p:cNvCxnSpPr/>
+      <p:sp>
+        <p:nvSpPr>
+          <p:cNvPr id="31" name="C3-E10 text 29" descr="sci-ppt:o029"/>
+          <p:cNvSpPr txBox="1"/>
           <p:nvPr/>
-        </p:nvCxnSpPr>
-        <p:spPr>
-          <a:xfrm>
-            <a:off x="4039362" y="1172615"/>
-            <a:ext cx="113157" cy="9031"/>
-          </a:xfrm>
-          <a:prstGeom prst="line">
-            <a:avLst/>
-          </a:prstGeom>
-          <a:ln w="25400">
-            <a:solidFill>
-              <a:srgbClr val="8EDBD4"/>
-            </a:solidFill>
-          </a:ln>
+        </p:nvSpPr>
+        <p:spPr>
+          <a:xfrm>
+            <a:off x="45720" y="3118104"/>
+            <a:ext cx="777240" cy="208407"/>
+          </a:xfrm>
+          <a:prstGeom prst="rect">
+            <a:avLst/>
+          </a:prstGeom>
+          <a:noFill/>
           <a:effectLst/>
         </p:spPr>
-      </p:cxnSp>
+        <p:txBody>
+          <a:bodyPr wrap="none" lIns="18288" rIns="18288" tIns="18288" bIns="18288" anchor="t">
+            <a:spAutoFit/>
+          </a:bodyPr>
+          <a:lstStyle/>
+          <a:p>
+            <a:pPr algn="r">
+              <a:spcAft>
+                <a:spcPts val="0"/>
+              </a:spcAft>
+            </a:pPr>
+            <a:r>
+              <a:rPr sz="1050" b="0" i="0">
+                <a:solidFill>
+                  <a:srgbClr val="B4C7D2"/>
+                </a:solidFill>
+                <a:latin typeface="Arial"/>
+              </a:rPr>
+              <a:t>1.5</a:t>
+            </a:r>
+          </a:p>
+        </p:txBody>
+      </p:sp>
       <p:cxnSp>
         <p:nvCxnSpPr>
           <p:cNvPr id="32" name="C3-E10 line 30" descr="sci-ppt:o030"/>
@@ -3786,15 +3944,15 @@
         </p:nvCxnSpPr>
         <p:spPr>
           <a:xfrm>
-            <a:off x="4152519" y="1181646"/>
-            <a:ext cx="113157" cy="9725"/>
+            <a:off x="850392" y="1894114"/>
+            <a:ext cx="64008" cy="0"/>
           </a:xfrm>
           <a:prstGeom prst="line">
             <a:avLst/>
           </a:prstGeom>
-          <a:ln w="25400">
+          <a:ln w="12700">
             <a:solidFill>
-              <a:srgbClr val="8EDBD4"/>
+              <a:srgbClr val="B4C7D2"/>
             </a:solidFill>
           </a:ln>
           <a:effectLst/>
@@ -3808,1152 +3966,849 @@
         </p:nvCxnSpPr>
         <p:spPr>
           <a:xfrm>
-            <a:off x="4265676" y="1191371"/>
-            <a:ext cx="113157" cy="10446"/>
+            <a:off x="914400" y="1894114"/>
+            <a:ext cx="6035040" cy="0"/>
           </a:xfrm>
           <a:prstGeom prst="line">
             <a:avLst/>
           </a:prstGeom>
-          <a:ln w="25400">
+          <a:ln w="7620">
+            <a:solidFill>
+              <a:srgbClr val="2E4756"/>
+            </a:solidFill>
+          </a:ln>
+          <a:effectLst/>
+        </p:spPr>
+      </p:cxnSp>
+      <p:sp>
+        <p:nvSpPr>
+          <p:cNvPr id="34" name="C3-E10 text 32" descr="sci-ppt:o032"/>
+          <p:cNvSpPr txBox="1"/>
+          <p:nvPr/>
+        </p:nvSpPr>
+        <p:spPr>
+          <a:xfrm>
+            <a:off x="45720" y="1811818"/>
+            <a:ext cx="777240" cy="208407"/>
+          </a:xfrm>
+          <a:prstGeom prst="rect">
+            <a:avLst/>
+          </a:prstGeom>
+          <a:noFill/>
+          <a:effectLst/>
+        </p:spPr>
+        <p:txBody>
+          <a:bodyPr wrap="none" lIns="18288" rIns="18288" tIns="18288" bIns="18288" anchor="t">
+            <a:spAutoFit/>
+          </a:bodyPr>
+          <a:lstStyle/>
+          <a:p>
+            <a:pPr algn="r">
+              <a:spcAft>
+                <a:spcPts val="0"/>
+              </a:spcAft>
+            </a:pPr>
+            <a:r>
+              <a:rPr sz="1050" b="0" i="0">
+                <a:solidFill>
+                  <a:srgbClr val="B4C7D2"/>
+                </a:solidFill>
+                <a:latin typeface="Arial"/>
+              </a:rPr>
+              <a:t>2.0</a:t>
+            </a:r>
+          </a:p>
+        </p:txBody>
+      </p:sp>
+      <p:sp>
+        <p:nvSpPr>
+          <p:cNvPr id="35" name="C3-E10 text 33" descr="sci-ppt:o033"/>
+          <p:cNvSpPr txBox="1"/>
+          <p:nvPr/>
+        </p:nvSpPr>
+        <p:spPr>
+          <a:xfrm>
+            <a:off x="914400" y="5312664"/>
+            <a:ext cx="6035040" cy="231648"/>
+          </a:xfrm>
+          <a:prstGeom prst="rect">
+            <a:avLst/>
+          </a:prstGeom>
+          <a:noFill/>
+          <a:effectLst/>
+        </p:spPr>
+        <p:txBody>
+          <a:bodyPr wrap="none" lIns="18288" rIns="18288" tIns="18288" bIns="18288" anchor="t">
+            <a:spAutoFit/>
+          </a:bodyPr>
+          <a:lstStyle/>
+          <a:p>
+            <a:pPr algn="ctr">
+              <a:spcAft>
+                <a:spcPts val="0"/>
+              </a:spcAft>
+            </a:pPr>
+            <a:r>
+              <a:rPr sz="1200" b="0" i="0">
+                <a:solidFill>
+                  <a:srgbClr val="E7F0F3"/>
+                </a:solidFill>
+                <a:latin typeface="Arial"/>
+              </a:rPr>
+              <a:t>interaction strength χ = S Rₘₐₓ</a:t>
+            </a:r>
+          </a:p>
+        </p:txBody>
+      </p:sp>
+      <p:sp>
+        <p:nvSpPr>
+          <p:cNvPr id="36" name="C3-E10 text 34" descr="sci-ppt:o034"/>
+          <p:cNvSpPr txBox="1"/>
+          <p:nvPr/>
+        </p:nvSpPr>
+        <p:spPr>
+          <a:xfrm>
+            <a:off x="365760" y="1024128"/>
+            <a:ext cx="6035040" cy="231648"/>
+          </a:xfrm>
+          <a:prstGeom prst="rect">
+            <a:avLst/>
+          </a:prstGeom>
+          <a:noFill/>
+          <a:effectLst/>
+        </p:spPr>
+        <p:txBody>
+          <a:bodyPr wrap="none" lIns="18288" rIns="18288" tIns="18288" bIns="18288" anchor="t">
+            <a:spAutoFit/>
+          </a:bodyPr>
+          <a:lstStyle/>
+          <a:p>
+            <a:pPr algn="l">
+              <a:spcAft>
+                <a:spcPts val="0"/>
+              </a:spcAft>
+            </a:pPr>
+            <a:r>
+              <a:rPr sz="1200" b="0" i="0">
+                <a:solidFill>
+                  <a:srgbClr val="E7F0F3"/>
+                </a:solidFill>
+                <a:latin typeface="Arial"/>
+              </a:rPr>
+              <a:t>C(χ) = t_c / [Rₘₐₓ √(ρ/Δp_c)]</a:t>
+            </a:r>
+          </a:p>
+        </p:txBody>
+      </p:sp>
+      <p:sp>
+        <p:nvSpPr>
+          <p:cNvPr id="37" name="C3-E10 polygon 35" descr="sci-ppt:o035"/>
+          <p:cNvSpPr/>
+          <p:nvPr/>
+        </p:nvSpPr>
+        <p:spPr>
+          <a:xfrm>
+            <a:off x="914400" y="1424499"/>
+            <a:ext cx="5880295" cy="3305087"/>
+          </a:xfrm>
+          <a:custGeom>
+            <a:avLst/>
+            <a:gdLst/>
+            <a:ahLst/>
+            <a:cxnLst/>
+            <a:rect l="l" t="t" r="r" b="b"/>
+            <a:pathLst>
+              <a:path w="5880295" h="3305087">
+                <a:moveTo>
+                  <a:pt x="0" y="3305087"/>
+                </a:moveTo>
+                <a:lnTo>
+                  <a:pt x="154744" y="3160322"/>
+                </a:lnTo>
+                <a:lnTo>
+                  <a:pt x="309489" y="3023773"/>
+                </a:lnTo>
+                <a:lnTo>
+                  <a:pt x="464233" y="2894153"/>
+                </a:lnTo>
+                <a:lnTo>
+                  <a:pt x="618978" y="2770482"/>
+                </a:lnTo>
+                <a:lnTo>
+                  <a:pt x="773723" y="2651997"/>
+                </a:lnTo>
+                <a:lnTo>
+                  <a:pt x="928467" y="2538084"/>
+                </a:lnTo>
+                <a:lnTo>
+                  <a:pt x="1083212" y="2428243"/>
+                </a:lnTo>
+                <a:lnTo>
+                  <a:pt x="1237956" y="2322062"/>
+                </a:lnTo>
+                <a:lnTo>
+                  <a:pt x="1392701" y="2219193"/>
+                </a:lnTo>
+                <a:lnTo>
+                  <a:pt x="1547446" y="2119340"/>
+                </a:lnTo>
+                <a:lnTo>
+                  <a:pt x="1702190" y="2022249"/>
+                </a:lnTo>
+                <a:lnTo>
+                  <a:pt x="1856935" y="1927702"/>
+                </a:lnTo>
+                <a:lnTo>
+                  <a:pt x="2011679" y="1835506"/>
+                </a:lnTo>
+                <a:lnTo>
+                  <a:pt x="2166424" y="1745492"/>
+                </a:lnTo>
+                <a:lnTo>
+                  <a:pt x="2321169" y="1657511"/>
+                </a:lnTo>
+                <a:lnTo>
+                  <a:pt x="2475913" y="1571431"/>
+                </a:lnTo>
+                <a:lnTo>
+                  <a:pt x="2630658" y="1487132"/>
+                </a:lnTo>
+                <a:lnTo>
+                  <a:pt x="2785403" y="1404507"/>
+                </a:lnTo>
+                <a:lnTo>
+                  <a:pt x="2940147" y="1323460"/>
+                </a:lnTo>
+                <a:lnTo>
+                  <a:pt x="3094892" y="1243903"/>
+                </a:lnTo>
+                <a:lnTo>
+                  <a:pt x="3249636" y="1165756"/>
+                </a:lnTo>
+                <a:lnTo>
+                  <a:pt x="3404381" y="1088947"/>
+                </a:lnTo>
+                <a:lnTo>
+                  <a:pt x="3559126" y="1013408"/>
+                </a:lnTo>
+                <a:lnTo>
+                  <a:pt x="3713870" y="939078"/>
+                </a:lnTo>
+                <a:lnTo>
+                  <a:pt x="3868615" y="865901"/>
+                </a:lnTo>
+                <a:lnTo>
+                  <a:pt x="4023359" y="793824"/>
+                </a:lnTo>
+                <a:lnTo>
+                  <a:pt x="4178104" y="722800"/>
+                </a:lnTo>
+                <a:lnTo>
+                  <a:pt x="4332849" y="652782"/>
+                </a:lnTo>
+                <a:lnTo>
+                  <a:pt x="4487593" y="583729"/>
+                </a:lnTo>
+                <a:lnTo>
+                  <a:pt x="4642338" y="515602"/>
+                </a:lnTo>
+                <a:lnTo>
+                  <a:pt x="4797083" y="448365"/>
+                </a:lnTo>
+                <a:lnTo>
+                  <a:pt x="4951827" y="381984"/>
+                </a:lnTo>
+                <a:lnTo>
+                  <a:pt x="5106572" y="316426"/>
+                </a:lnTo>
+                <a:lnTo>
+                  <a:pt x="5261316" y="251662"/>
+                </a:lnTo>
+                <a:lnTo>
+                  <a:pt x="5416061" y="187663"/>
+                </a:lnTo>
+                <a:lnTo>
+                  <a:pt x="5570806" y="124403"/>
+                </a:lnTo>
+                <a:lnTo>
+                  <a:pt x="5725550" y="61856"/>
+                </a:lnTo>
+                <a:lnTo>
+                  <a:pt x="5880295" y="0"/>
+                </a:lnTo>
+              </a:path>
+            </a:pathLst>
+          </a:custGeom>
+          <a:noFill/>
+          <a:ln w="38100">
             <a:solidFill>
               <a:srgbClr val="8EDBD4"/>
             </a:solidFill>
           </a:ln>
           <a:effectLst/>
         </p:spPr>
-      </p:cxnSp>
-      <p:cxnSp>
-        <p:nvCxnSpPr>
-          <p:cNvPr id="34" name="C3-E10 line 32" descr="sci-ppt:o032"/>
-          <p:cNvCxnSpPr/>
+        <p:txBody>
+          <a:bodyPr rtlCol="0" anchor="ctr"/>
+          <a:lstStyle/>
+          <a:p>
+            <a:pPr algn="ctr"/>
+          </a:p>
+        </p:txBody>
+      </p:sp>
+      <p:sp>
+        <p:nvSpPr>
+          <p:cNvPr id="38" name="C3-E10 ellipse 36" descr="sci-ppt:o036"/>
+          <p:cNvSpPr/>
           <p:nvPr/>
-        </p:nvCxnSpPr>
-        <p:spPr>
-          <a:xfrm>
-            <a:off x="4378833" y="1201817"/>
-            <a:ext cx="113157" cy="11191"/>
-          </a:xfrm>
-          <a:prstGeom prst="line">
-            <a:avLst/>
-          </a:prstGeom>
-          <a:ln w="25400">
+        </p:nvSpPr>
+        <p:spPr>
+          <a:xfrm>
+            <a:off x="841248" y="4656434"/>
+            <a:ext cx="146304" cy="146304"/>
+          </a:xfrm>
+          <a:prstGeom prst="ellipse">
+            <a:avLst/>
+          </a:prstGeom>
+          <a:solidFill>
+            <a:srgbClr val="F2B880"/>
+          </a:solidFill>
+          <a:ln w="12700">
+            <a:solidFill>
+              <a:srgbClr val="F2B880"/>
+            </a:solidFill>
+          </a:ln>
+          <a:effectLst/>
+        </p:spPr>
+        <p:txBody>
+          <a:bodyPr rtlCol="0" anchor="ctr"/>
+          <a:lstStyle/>
+          <a:p>
+            <a:pPr algn="ctr"/>
+          </a:p>
+        </p:txBody>
+      </p:sp>
+      <p:sp>
+        <p:nvSpPr>
+          <p:cNvPr id="39" name="C3-E10 text 37" descr="sci-ppt:o037"/>
+          <p:cNvSpPr txBox="1"/>
+          <p:nvPr/>
+        </p:nvSpPr>
+        <p:spPr>
+          <a:xfrm>
+            <a:off x="1051560" y="4318106"/>
+            <a:ext cx="2194560" cy="231648"/>
+          </a:xfrm>
+          <a:prstGeom prst="rect">
+            <a:avLst/>
+          </a:prstGeom>
+          <a:noFill/>
+          <a:effectLst/>
+        </p:spPr>
+        <p:txBody>
+          <a:bodyPr wrap="none" lIns="18288" rIns="18288" tIns="18288" bIns="18288" anchor="t">
+            <a:spAutoFit/>
+          </a:bodyPr>
+          <a:lstStyle/>
+          <a:p>
+            <a:pPr algn="l">
+              <a:spcAft>
+                <a:spcPts val="0"/>
+              </a:spcAft>
+            </a:pPr>
+            <a:r>
+              <a:rPr sz="1200" b="0" i="0">
+                <a:solidFill>
+                  <a:srgbClr val="F2B880"/>
+                </a:solidFill>
+                <a:latin typeface="Arial"/>
+              </a:rPr>
+              <a:t>C(0) = 0.9147: isolated</a:t>
+            </a:r>
+          </a:p>
+        </p:txBody>
+      </p:sp>
+      <p:sp>
+        <p:nvSpPr>
+          <p:cNvPr id="40" name="C3-E10 ellipse 38" descr="sci-ppt:o038"/>
+          <p:cNvSpPr/>
+          <p:nvPr/>
+        </p:nvSpPr>
+        <p:spPr>
+          <a:xfrm>
+            <a:off x="1847087" y="3834029"/>
+            <a:ext cx="146304" cy="146304"/>
+          </a:xfrm>
+          <a:prstGeom prst="ellipse">
+            <a:avLst/>
+          </a:prstGeom>
+          <a:solidFill>
+            <a:srgbClr val="F28BA0"/>
+          </a:solidFill>
+          <a:ln w="12700">
+            <a:solidFill>
+              <a:srgbClr val="F28BA0"/>
+            </a:solidFill>
+          </a:ln>
+          <a:effectLst/>
+        </p:spPr>
+        <p:txBody>
+          <a:bodyPr rtlCol="0" anchor="ctr"/>
+          <a:lstStyle/>
+          <a:p>
+            <a:pPr algn="ctr"/>
+          </a:p>
+        </p:txBody>
+      </p:sp>
+      <p:sp>
+        <p:nvSpPr>
+          <p:cNvPr id="41" name="C3-E10 text 39" descr="sci-ppt:o039"/>
+          <p:cNvSpPr txBox="1"/>
+          <p:nvPr/>
+        </p:nvSpPr>
+        <p:spPr>
+          <a:xfrm>
+            <a:off x="2029967" y="3495701"/>
+            <a:ext cx="1645920" cy="231648"/>
+          </a:xfrm>
+          <a:prstGeom prst="rect">
+            <a:avLst/>
+          </a:prstGeom>
+          <a:noFill/>
+          <a:effectLst/>
+        </p:spPr>
+        <p:txBody>
+          <a:bodyPr wrap="none" lIns="18288" rIns="18288" tIns="18288" bIns="18288" anchor="t">
+            <a:spAutoFit/>
+          </a:bodyPr>
+          <a:lstStyle/>
+          <a:p>
+            <a:pPr algn="l">
+              <a:spcAft>
+                <a:spcPts val="0"/>
+              </a:spcAft>
+            </a:pPr>
+            <a:r>
+              <a:rPr sz="1200" b="0" i="0">
+                <a:solidFill>
+                  <a:srgbClr val="F28BA0"/>
+                </a:solidFill>
+                <a:latin typeface="Arial"/>
+              </a:rPr>
+              <a:t>χ = 1: 1.229</a:t>
+            </a:r>
+          </a:p>
+        </p:txBody>
+      </p:sp>
+      <p:sp>
+        <p:nvSpPr>
+          <p:cNvPr id="42" name="C3-E10 ellipse 40" descr="sci-ppt:o040"/>
+          <p:cNvSpPr/>
+          <p:nvPr/>
+        </p:nvSpPr>
+        <p:spPr>
+          <a:xfrm>
+            <a:off x="3858768" y="2634848"/>
+            <a:ext cx="146304" cy="146304"/>
+          </a:xfrm>
+          <a:prstGeom prst="ellipse">
+            <a:avLst/>
+          </a:prstGeom>
+          <a:solidFill>
+            <a:srgbClr val="7FC8F8"/>
+          </a:solidFill>
+          <a:ln w="12700">
+            <a:solidFill>
+              <a:srgbClr val="7FC8F8"/>
+            </a:solidFill>
+          </a:ln>
+          <a:effectLst/>
+        </p:spPr>
+        <p:txBody>
+          <a:bodyPr rtlCol="0" anchor="ctr"/>
+          <a:lstStyle/>
+          <a:p>
+            <a:pPr algn="ctr"/>
+          </a:p>
+        </p:txBody>
+      </p:sp>
+      <p:sp>
+        <p:nvSpPr>
+          <p:cNvPr id="43" name="C3-E10 text 41" descr="sci-ppt:o041"/>
+          <p:cNvSpPr txBox="1"/>
+          <p:nvPr/>
+        </p:nvSpPr>
+        <p:spPr>
+          <a:xfrm>
+            <a:off x="4041648" y="2296520"/>
+            <a:ext cx="1645920" cy="231648"/>
+          </a:xfrm>
+          <a:prstGeom prst="rect">
+            <a:avLst/>
+          </a:prstGeom>
+          <a:noFill/>
+          <a:effectLst/>
+        </p:spPr>
+        <p:txBody>
+          <a:bodyPr wrap="none" lIns="18288" rIns="18288" tIns="18288" bIns="18288" anchor="t">
+            <a:spAutoFit/>
+          </a:bodyPr>
+          <a:lstStyle/>
+          <a:p>
+            <a:pPr algn="l">
+              <a:spcAft>
+                <a:spcPts val="0"/>
+              </a:spcAft>
+            </a:pPr>
+            <a:r>
+              <a:rPr sz="1200" b="0" i="0">
+                <a:solidFill>
+                  <a:srgbClr val="7FC8F8"/>
+                </a:solidFill>
+                <a:latin typeface="Arial"/>
+              </a:rPr>
+              <a:t>χ = 3: 1.688</a:t>
+            </a:r>
+          </a:p>
+        </p:txBody>
+      </p:sp>
+      <p:sp>
+        <p:nvSpPr>
+          <p:cNvPr id="44" name="C3-E10 round_rect 42" descr="sci-ppt:o042"/>
+          <p:cNvSpPr/>
+          <p:nvPr/>
+        </p:nvSpPr>
+        <p:spPr>
+          <a:xfrm>
+            <a:off x="7223760" y="1371600"/>
+            <a:ext cx="4617720" cy="3657600"/>
+          </a:xfrm>
+          <a:prstGeom prst="roundRect">
+            <a:avLst/>
+          </a:prstGeom>
+          <a:solidFill>
+            <a:srgbClr val="213E4B"/>
+          </a:solidFill>
+          <a:ln w="20320">
             <a:solidFill>
               <a:srgbClr val="8EDBD4"/>
             </a:solidFill>
           </a:ln>
           <a:effectLst/>
         </p:spPr>
-      </p:cxnSp>
-      <p:cxnSp>
-        <p:nvCxnSpPr>
-          <p:cNvPr id="35" name="C3-E10 line 33" descr="sci-ppt:o033"/>
-          <p:cNvCxnSpPr/>
+        <p:txBody>
+          <a:bodyPr rtlCol="0" anchor="ctr"/>
+          <a:lstStyle/>
+          <a:p>
+            <a:pPr algn="ctr"/>
+          </a:p>
+        </p:txBody>
+      </p:sp>
+      <p:sp>
+        <p:nvSpPr>
+          <p:cNvPr id="45" name="C3-E10 text 43" descr="sci-ppt:o043"/>
+          <p:cNvSpPr txBox="1"/>
           <p:nvPr/>
-        </p:nvCxnSpPr>
-        <p:spPr>
-          <a:xfrm>
-            <a:off x="4491990" y="1213008"/>
-            <a:ext cx="113157" cy="11963"/>
-          </a:xfrm>
-          <a:prstGeom prst="line">
-            <a:avLst/>
-          </a:prstGeom>
-          <a:ln w="25400">
+        </p:nvSpPr>
+        <p:spPr>
+          <a:xfrm>
+            <a:off x="7333488" y="1426464"/>
+            <a:ext cx="4398264" cy="254889"/>
+          </a:xfrm>
+          <a:prstGeom prst="rect">
+            <a:avLst/>
+          </a:prstGeom>
+          <a:noFill/>
+          <a:effectLst/>
+        </p:spPr>
+        <p:txBody>
+          <a:bodyPr wrap="none" lIns="18288" rIns="18288" tIns="18288" bIns="18288" anchor="t">
+            <a:spAutoFit/>
+          </a:bodyPr>
+          <a:lstStyle/>
+          <a:p>
+            <a:pPr algn="l">
+              <a:spcAft>
+                <a:spcPts val="0"/>
+              </a:spcAft>
+            </a:pPr>
+            <a:r>
+              <a:rPr sz="1350" b="1" i="0">
+                <a:solidFill>
+                  <a:srgbClr val="8EDBD4"/>
+                </a:solidFill>
+                <a:latin typeface="Arial"/>
+              </a:rPr>
+              <a:t>Interaction delays the collapse</a:t>
+            </a:r>
+          </a:p>
+        </p:txBody>
+      </p:sp>
+      <p:sp>
+        <p:nvSpPr>
+          <p:cNvPr id="46" name="C3-E10 text 44" descr="sci-ppt:o044"/>
+          <p:cNvSpPr txBox="1"/>
+          <p:nvPr/>
+        </p:nvSpPr>
+        <p:spPr>
+          <a:xfrm>
+            <a:off x="7360920" y="1828800"/>
+            <a:ext cx="4389120" cy="231648"/>
+          </a:xfrm>
+          <a:prstGeom prst="rect">
+            <a:avLst/>
+          </a:prstGeom>
+          <a:noFill/>
+          <a:effectLst/>
+        </p:spPr>
+        <p:txBody>
+          <a:bodyPr wrap="none" lIns="18288" rIns="18288" tIns="18288" bIns="18288" anchor="t">
+            <a:spAutoFit/>
+          </a:bodyPr>
+          <a:lstStyle/>
+          <a:p>
+            <a:pPr algn="l">
+              <a:spcAft>
+                <a:spcPts val="0"/>
+              </a:spcAft>
+            </a:pPr>
+            <a:r>
+              <a:rPr sz="1200" b="1" i="0">
+                <a:solidFill>
+                  <a:srgbClr val="E7F0F3"/>
+                </a:solidFill>
+                <a:latin typeface="Arial"/>
+              </a:rPr>
+              <a:t>C(χ) = √(3/2) ∫₀¹ √[ x³(1 + χx) / (1 − x³) ] dx</a:t>
+            </a:r>
+          </a:p>
+        </p:txBody>
+      </p:sp>
+      <p:sp>
+        <p:nvSpPr>
+          <p:cNvPr id="47" name="C3-E10 text 45" descr="sci-ppt:o045"/>
+          <p:cNvSpPr txBox="1"/>
+          <p:nvPr/>
+        </p:nvSpPr>
+        <p:spPr>
+          <a:xfrm>
+            <a:off x="7360920" y="2560320"/>
+            <a:ext cx="4389120" cy="223900"/>
+          </a:xfrm>
+          <a:prstGeom prst="rect">
+            <a:avLst/>
+          </a:prstGeom>
+          <a:noFill/>
+          <a:effectLst/>
+        </p:spPr>
+        <p:txBody>
+          <a:bodyPr wrap="none" lIns="18288" rIns="18288" tIns="18288" bIns="18288" anchor="t">
+            <a:spAutoFit/>
+          </a:bodyPr>
+          <a:lstStyle/>
+          <a:p>
+            <a:pPr algn="l">
+              <a:spcAft>
+                <a:spcPts val="0"/>
+              </a:spcAft>
+            </a:pPr>
+            <a:r>
+              <a:rPr sz="1150" b="1" i="0">
+                <a:solidFill>
+                  <a:srgbClr val="F2B880"/>
+                </a:solidFill>
+                <a:latin typeface="Arial"/>
+              </a:rPr>
+              <a:t>C′(χ) = ½√(3/2) ∫₀¹ x^(5/2) / √[(1 − x³)(1 + χx)] dx &gt; 0</a:t>
+            </a:r>
+          </a:p>
+        </p:txBody>
+      </p:sp>
+      <p:sp>
+        <p:nvSpPr>
+          <p:cNvPr id="48" name="C3-E10 text 46" descr="sci-ppt:o046"/>
+          <p:cNvSpPr txBox="1"/>
+          <p:nvPr/>
+        </p:nvSpPr>
+        <p:spPr>
+          <a:xfrm>
+            <a:off x="7562088" y="3200400"/>
+            <a:ext cx="4187952" cy="417576"/>
+          </a:xfrm>
+          <a:prstGeom prst="rect">
+            <a:avLst/>
+          </a:prstGeom>
+          <a:noFill/>
+          <a:effectLst/>
+        </p:spPr>
+        <p:txBody>
+          <a:bodyPr wrap="none" lIns="18288" rIns="18288" tIns="18288" bIns="18288" anchor="t">
+            <a:spAutoFit/>
+          </a:bodyPr>
+          <a:lstStyle/>
+          <a:p>
+            <a:pPr algn="l">
+              <a:spcAft>
+                <a:spcPts val="0"/>
+              </a:spcAft>
+            </a:pPr>
+            <a:r>
+              <a:rPr sz="1200" b="0" i="0">
+                <a:solidFill>
+                  <a:srgbClr val="E7F0F3"/>
+                </a:solidFill>
+                <a:latin typeface="Arial"/>
+              </a:rPr>
+              <a:t>The integrand of C′ is positive, so C always rises</a:t>
+            </a:r>
+          </a:p>
+          <a:p>
+            <a:pPr algn="l">
+              <a:spcAft>
+                <a:spcPts val="0"/>
+              </a:spcAft>
+            </a:pPr>
+            <a:r>
+              <a:rPr sz="1200" b="0" i="0">
+                <a:solidFill>
+                  <a:srgbClr val="E7F0F3"/>
+                </a:solidFill>
+                <a:latin typeface="Arial"/>
+              </a:rPr>
+              <a:t>with χ.</a:t>
+            </a:r>
+          </a:p>
+        </p:txBody>
+      </p:sp>
+      <p:sp>
+        <p:nvSpPr>
+          <p:cNvPr id="49" name="C3-E10 ellipse 47" descr="sci-ppt:o047"/>
+          <p:cNvSpPr/>
+          <p:nvPr/>
+        </p:nvSpPr>
+        <p:spPr>
+          <a:xfrm>
+            <a:off x="7392924" y="3253740"/>
+            <a:ext cx="82296" cy="82296"/>
+          </a:xfrm>
+          <a:prstGeom prst="ellipse">
+            <a:avLst/>
+          </a:prstGeom>
+          <a:solidFill>
+            <a:srgbClr val="8EDBD4"/>
+          </a:solidFill>
+          <a:ln w="12700">
             <a:solidFill>
               <a:srgbClr val="8EDBD4"/>
             </a:solidFill>
           </a:ln>
           <a:effectLst/>
         </p:spPr>
-      </p:cxnSp>
-      <p:cxnSp>
-        <p:nvCxnSpPr>
-          <p:cNvPr id="36" name="C3-E10 line 34" descr="sci-ppt:o034"/>
-          <p:cNvCxnSpPr/>
+        <p:txBody>
+          <a:bodyPr rtlCol="0" anchor="ctr"/>
+          <a:lstStyle/>
+          <a:p>
+            <a:pPr algn="ctr"/>
+          </a:p>
+        </p:txBody>
+      </p:sp>
+      <p:sp>
+        <p:nvSpPr>
+          <p:cNvPr id="50" name="C3-E10 text 48" descr="sci-ppt:o048"/>
+          <p:cNvSpPr txBox="1"/>
           <p:nvPr/>
-        </p:nvCxnSpPr>
-        <p:spPr>
-          <a:xfrm>
-            <a:off x="4605147" y="1224971"/>
-            <a:ext cx="113157" cy="12760"/>
-          </a:xfrm>
-          <a:prstGeom prst="line">
-            <a:avLst/>
-          </a:prstGeom>
-          <a:ln w="25400">
+        </p:nvSpPr>
+        <p:spPr>
+          <a:xfrm>
+            <a:off x="7562088" y="3663696"/>
+            <a:ext cx="4187952" cy="417576"/>
+          </a:xfrm>
+          <a:prstGeom prst="rect">
+            <a:avLst/>
+          </a:prstGeom>
+          <a:noFill/>
+          <a:effectLst/>
+        </p:spPr>
+        <p:txBody>
+          <a:bodyPr wrap="none" lIns="18288" rIns="18288" tIns="18288" bIns="18288" anchor="t">
+            <a:spAutoFit/>
+          </a:bodyPr>
+          <a:lstStyle/>
+          <a:p>
+            <a:pPr algn="l">
+              <a:spcAft>
+                <a:spcPts val="0"/>
+              </a:spcAft>
+            </a:pPr>
+            <a:r>
+              <a:rPr sz="1200" b="0" i="0">
+                <a:solidFill>
+                  <a:srgbClr val="E7F0F3"/>
+                </a:solidFill>
+                <a:latin typeface="Arial"/>
+              </a:rPr>
+              <a:t>At χ = 3 the formal collapse time is 1.85 times the</a:t>
+            </a:r>
+          </a:p>
+          <a:p>
+            <a:pPr algn="l">
+              <a:spcAft>
+                <a:spcPts val="0"/>
+              </a:spcAft>
+            </a:pPr>
+            <a:r>
+              <a:rPr sz="1200" b="0" i="0">
+                <a:solidFill>
+                  <a:srgbClr val="E7F0F3"/>
+                </a:solidFill>
+                <a:latin typeface="Arial"/>
+              </a:rPr>
+              <a:t>isolated one.</a:t>
+            </a:r>
+          </a:p>
+        </p:txBody>
+      </p:sp>
+      <p:sp>
+        <p:nvSpPr>
+          <p:cNvPr id="51" name="C3-E10 ellipse 49" descr="sci-ppt:o049"/>
+          <p:cNvSpPr/>
+          <p:nvPr/>
+        </p:nvSpPr>
+        <p:spPr>
+          <a:xfrm>
+            <a:off x="7392924" y="3717036"/>
+            <a:ext cx="82296" cy="82296"/>
+          </a:xfrm>
+          <a:prstGeom prst="ellipse">
+            <a:avLst/>
+          </a:prstGeom>
+          <a:solidFill>
+            <a:srgbClr val="8EDBD4"/>
+          </a:solidFill>
+          <a:ln w="12700">
             <a:solidFill>
               <a:srgbClr val="8EDBD4"/>
             </a:solidFill>
           </a:ln>
           <a:effectLst/>
         </p:spPr>
-      </p:cxnSp>
-      <p:cxnSp>
-        <p:nvCxnSpPr>
-          <p:cNvPr id="37" name="C3-E10 line 35" descr="sci-ppt:o035"/>
-          <p:cNvCxnSpPr/>
-          <p:nvPr/>
-        </p:nvCxnSpPr>
-        <p:spPr>
-          <a:xfrm>
-            <a:off x="4718304" y="1237731"/>
-            <a:ext cx="113157" cy="13583"/>
-          </a:xfrm>
-          <a:prstGeom prst="line">
-            <a:avLst/>
-          </a:prstGeom>
-          <a:ln w="25400">
-            <a:solidFill>
-              <a:srgbClr val="8EDBD4"/>
-            </a:solidFill>
-          </a:ln>
-          <a:effectLst/>
-        </p:spPr>
-      </p:cxnSp>
-      <p:cxnSp>
-        <p:nvCxnSpPr>
-          <p:cNvPr id="38" name="C3-E10 line 36" descr="sci-ppt:o036"/>
-          <p:cNvCxnSpPr/>
-          <p:nvPr/>
-        </p:nvCxnSpPr>
-        <p:spPr>
-          <a:xfrm>
-            <a:off x="4831461" y="1251314"/>
-            <a:ext cx="113157" cy="14432"/>
-          </a:xfrm>
-          <a:prstGeom prst="line">
-            <a:avLst/>
-          </a:prstGeom>
-          <a:ln w="25400">
-            <a:solidFill>
-              <a:srgbClr val="8EDBD4"/>
-            </a:solidFill>
-          </a:ln>
-          <a:effectLst/>
-        </p:spPr>
-      </p:cxnSp>
-      <p:cxnSp>
-        <p:nvCxnSpPr>
-          <p:cNvPr id="39" name="C3-E10 line 37" descr="sci-ppt:o037"/>
-          <p:cNvCxnSpPr/>
-          <p:nvPr/>
-        </p:nvCxnSpPr>
-        <p:spPr>
-          <a:xfrm>
-            <a:off x="4944618" y="1265746"/>
-            <a:ext cx="113157" cy="15306"/>
-          </a:xfrm>
-          <a:prstGeom prst="line">
-            <a:avLst/>
-          </a:prstGeom>
-          <a:ln w="25400">
-            <a:solidFill>
-              <a:srgbClr val="8EDBD4"/>
-            </a:solidFill>
-          </a:ln>
-          <a:effectLst/>
-        </p:spPr>
-      </p:cxnSp>
-      <p:cxnSp>
-        <p:nvCxnSpPr>
-          <p:cNvPr id="40" name="C3-E10 line 38" descr="sci-ppt:o038"/>
-          <p:cNvCxnSpPr/>
-          <p:nvPr/>
-        </p:nvCxnSpPr>
-        <p:spPr>
-          <a:xfrm>
-            <a:off x="5057775" y="1281052"/>
-            <a:ext cx="113157" cy="16207"/>
-          </a:xfrm>
-          <a:prstGeom prst="line">
-            <a:avLst/>
-          </a:prstGeom>
-          <a:ln w="25400">
-            <a:solidFill>
-              <a:srgbClr val="8EDBD4"/>
-            </a:solidFill>
-          </a:ln>
-          <a:effectLst/>
-        </p:spPr>
-      </p:cxnSp>
-      <p:cxnSp>
-        <p:nvCxnSpPr>
-          <p:cNvPr id="41" name="C3-E10 line 39" descr="sci-ppt:o039"/>
-          <p:cNvCxnSpPr/>
-          <p:nvPr/>
-        </p:nvCxnSpPr>
-        <p:spPr>
-          <a:xfrm>
-            <a:off x="5170932" y="1297259"/>
-            <a:ext cx="113157" cy="17132"/>
-          </a:xfrm>
-          <a:prstGeom prst="line">
-            <a:avLst/>
-          </a:prstGeom>
-          <a:ln w="25400">
-            <a:solidFill>
-              <a:srgbClr val="8EDBD4"/>
-            </a:solidFill>
-          </a:ln>
-          <a:effectLst/>
-        </p:spPr>
-      </p:cxnSp>
-      <p:cxnSp>
-        <p:nvCxnSpPr>
-          <p:cNvPr id="42" name="C3-E10 line 40" descr="sci-ppt:o040"/>
-          <p:cNvCxnSpPr/>
-          <p:nvPr/>
-        </p:nvCxnSpPr>
-        <p:spPr>
-          <a:xfrm>
-            <a:off x="5284089" y="1314391"/>
-            <a:ext cx="113157" cy="18084"/>
-          </a:xfrm>
-          <a:prstGeom prst="line">
-            <a:avLst/>
-          </a:prstGeom>
-          <a:ln w="25400">
-            <a:solidFill>
-              <a:srgbClr val="8EDBD4"/>
-            </a:solidFill>
-          </a:ln>
-          <a:effectLst/>
-        </p:spPr>
-      </p:cxnSp>
-      <p:cxnSp>
-        <p:nvCxnSpPr>
-          <p:cNvPr id="43" name="C3-E10 line 41" descr="sci-ppt:o041"/>
-          <p:cNvCxnSpPr/>
-          <p:nvPr/>
-        </p:nvCxnSpPr>
-        <p:spPr>
-          <a:xfrm>
-            <a:off x="5397246" y="1332475"/>
-            <a:ext cx="113157" cy="19061"/>
-          </a:xfrm>
-          <a:prstGeom prst="line">
-            <a:avLst/>
-          </a:prstGeom>
-          <a:ln w="25400">
-            <a:solidFill>
-              <a:srgbClr val="8EDBD4"/>
-            </a:solidFill>
-          </a:ln>
-          <a:effectLst/>
-        </p:spPr>
-      </p:cxnSp>
-      <p:cxnSp>
-        <p:nvCxnSpPr>
-          <p:cNvPr id="44" name="C3-E10 line 42" descr="sci-ppt:o042"/>
-          <p:cNvCxnSpPr/>
-          <p:nvPr/>
-        </p:nvCxnSpPr>
-        <p:spPr>
-          <a:xfrm>
-            <a:off x="5510403" y="1351536"/>
-            <a:ext cx="113157" cy="20064"/>
-          </a:xfrm>
-          <a:prstGeom prst="line">
-            <a:avLst/>
-          </a:prstGeom>
-          <a:ln w="25400">
-            <a:solidFill>
-              <a:srgbClr val="8EDBD4"/>
-            </a:solidFill>
-          </a:ln>
-          <a:effectLst/>
-        </p:spPr>
-      </p:cxnSp>
-      <p:cxnSp>
-        <p:nvCxnSpPr>
-          <p:cNvPr id="45" name="C3-E10 line 43" descr="sci-ppt:o043"/>
-          <p:cNvCxnSpPr/>
-          <p:nvPr/>
-        </p:nvCxnSpPr>
-        <p:spPr>
-          <a:xfrm>
-            <a:off x="5623560" y="1371600"/>
-            <a:ext cx="113157" cy="21092"/>
-          </a:xfrm>
-          <a:prstGeom prst="line">
-            <a:avLst/>
-          </a:prstGeom>
-          <a:ln w="25400">
-            <a:solidFill>
-              <a:srgbClr val="8EDBD4"/>
-            </a:solidFill>
-          </a:ln>
-          <a:effectLst/>
-        </p:spPr>
-      </p:cxnSp>
-      <p:cxnSp>
-        <p:nvCxnSpPr>
-          <p:cNvPr id="46" name="C3-E10 line 44" descr="sci-ppt:o044"/>
-          <p:cNvCxnSpPr/>
-          <p:nvPr/>
-        </p:nvCxnSpPr>
-        <p:spPr>
-          <a:xfrm>
-            <a:off x="5736717" y="1392692"/>
-            <a:ext cx="113157" cy="22147"/>
-          </a:xfrm>
-          <a:prstGeom prst="line">
-            <a:avLst/>
-          </a:prstGeom>
-          <a:ln w="25400">
-            <a:solidFill>
-              <a:srgbClr val="8EDBD4"/>
-            </a:solidFill>
-          </a:ln>
-          <a:effectLst/>
-        </p:spPr>
-      </p:cxnSp>
-      <p:cxnSp>
-        <p:nvCxnSpPr>
-          <p:cNvPr id="47" name="C3-E10 line 45" descr="sci-ppt:o045"/>
-          <p:cNvCxnSpPr/>
-          <p:nvPr/>
-        </p:nvCxnSpPr>
-        <p:spPr>
-          <a:xfrm>
-            <a:off x="5849874" y="1414839"/>
-            <a:ext cx="113157" cy="23227"/>
-          </a:xfrm>
-          <a:prstGeom prst="line">
-            <a:avLst/>
-          </a:prstGeom>
-          <a:ln w="25400">
-            <a:solidFill>
-              <a:srgbClr val="8EDBD4"/>
-            </a:solidFill>
-          </a:ln>
-          <a:effectLst/>
-        </p:spPr>
-      </p:cxnSp>
-      <p:cxnSp>
-        <p:nvCxnSpPr>
-          <p:cNvPr id="48" name="C3-E10 line 46" descr="sci-ppt:o046"/>
-          <p:cNvCxnSpPr/>
-          <p:nvPr/>
-        </p:nvCxnSpPr>
-        <p:spPr>
-          <a:xfrm>
-            <a:off x="5963031" y="1438066"/>
-            <a:ext cx="113157" cy="24333"/>
-          </a:xfrm>
-          <a:prstGeom prst="line">
-            <a:avLst/>
-          </a:prstGeom>
-          <a:ln w="25400">
-            <a:solidFill>
-              <a:srgbClr val="8EDBD4"/>
-            </a:solidFill>
-          </a:ln>
-          <a:effectLst/>
-        </p:spPr>
-      </p:cxnSp>
-      <p:cxnSp>
-        <p:nvCxnSpPr>
-          <p:cNvPr id="49" name="C3-E10 line 47" descr="sci-ppt:o047"/>
-          <p:cNvCxnSpPr/>
-          <p:nvPr/>
-        </p:nvCxnSpPr>
-        <p:spPr>
-          <a:xfrm>
-            <a:off x="6076188" y="1462399"/>
-            <a:ext cx="113157" cy="25465"/>
-          </a:xfrm>
-          <a:prstGeom prst="line">
-            <a:avLst/>
-          </a:prstGeom>
-          <a:ln w="25400">
-            <a:solidFill>
-              <a:srgbClr val="8EDBD4"/>
-            </a:solidFill>
-          </a:ln>
-          <a:effectLst/>
-        </p:spPr>
-      </p:cxnSp>
-      <p:cxnSp>
-        <p:nvCxnSpPr>
-          <p:cNvPr id="50" name="C3-E10 line 48" descr="sci-ppt:o048"/>
-          <p:cNvCxnSpPr/>
-          <p:nvPr/>
-        </p:nvCxnSpPr>
-        <p:spPr>
-          <a:xfrm>
-            <a:off x="6189345" y="1487864"/>
-            <a:ext cx="113157" cy="26622"/>
-          </a:xfrm>
-          <a:prstGeom prst="line">
-            <a:avLst/>
-          </a:prstGeom>
-          <a:ln w="25400">
-            <a:solidFill>
-              <a:srgbClr val="8EDBD4"/>
-            </a:solidFill>
-          </a:ln>
-          <a:effectLst/>
-        </p:spPr>
-      </p:cxnSp>
-      <p:cxnSp>
-        <p:nvCxnSpPr>
-          <p:cNvPr id="51" name="C3-E10 line 49" descr="sci-ppt:o049"/>
-          <p:cNvCxnSpPr/>
-          <p:nvPr/>
-        </p:nvCxnSpPr>
-        <p:spPr>
-          <a:xfrm>
-            <a:off x="6302502" y="1514486"/>
-            <a:ext cx="113157" cy="27805"/>
-          </a:xfrm>
-          <a:prstGeom prst="line">
-            <a:avLst/>
-          </a:prstGeom>
-          <a:ln w="25400">
-            <a:solidFill>
-              <a:srgbClr val="8EDBD4"/>
-            </a:solidFill>
-          </a:ln>
-          <a:effectLst/>
-        </p:spPr>
-      </p:cxnSp>
-      <p:cxnSp>
-        <p:nvCxnSpPr>
-          <p:cNvPr id="52" name="C3-E10 line 50" descr="sci-ppt:o050"/>
-          <p:cNvCxnSpPr/>
-          <p:nvPr/>
-        </p:nvCxnSpPr>
-        <p:spPr>
-          <a:xfrm>
-            <a:off x="6415659" y="1542291"/>
-            <a:ext cx="113157" cy="29013"/>
-          </a:xfrm>
-          <a:prstGeom prst="line">
-            <a:avLst/>
-          </a:prstGeom>
-          <a:ln w="25400">
-            <a:solidFill>
-              <a:srgbClr val="8EDBD4"/>
-            </a:solidFill>
-          </a:ln>
-          <a:effectLst/>
-        </p:spPr>
-      </p:cxnSp>
-      <p:cxnSp>
-        <p:nvCxnSpPr>
-          <p:cNvPr id="53" name="C3-E10 line 51" descr="sci-ppt:o051"/>
-          <p:cNvCxnSpPr/>
-          <p:nvPr/>
-        </p:nvCxnSpPr>
-        <p:spPr>
-          <a:xfrm>
-            <a:off x="6528816" y="1571304"/>
-            <a:ext cx="113157" cy="30249"/>
-          </a:xfrm>
-          <a:prstGeom prst="line">
-            <a:avLst/>
-          </a:prstGeom>
-          <a:ln w="25400">
-            <a:solidFill>
-              <a:srgbClr val="8EDBD4"/>
-            </a:solidFill>
-          </a:ln>
-          <a:effectLst/>
-        </p:spPr>
-      </p:cxnSp>
-      <p:cxnSp>
-        <p:nvCxnSpPr>
-          <p:cNvPr id="54" name="C3-E10 line 52" descr="sci-ppt:o052"/>
-          <p:cNvCxnSpPr/>
-          <p:nvPr/>
-        </p:nvCxnSpPr>
-        <p:spPr>
-          <a:xfrm>
-            <a:off x="6641973" y="1601553"/>
-            <a:ext cx="113157" cy="31508"/>
-          </a:xfrm>
-          <a:prstGeom prst="line">
-            <a:avLst/>
-          </a:prstGeom>
-          <a:ln w="25400">
-            <a:solidFill>
-              <a:srgbClr val="8EDBD4"/>
-            </a:solidFill>
-          </a:ln>
-          <a:effectLst/>
-        </p:spPr>
-      </p:cxnSp>
-      <p:cxnSp>
-        <p:nvCxnSpPr>
-          <p:cNvPr id="55" name="C3-E10 line 53" descr="sci-ppt:o053"/>
-          <p:cNvCxnSpPr/>
-          <p:nvPr/>
-        </p:nvCxnSpPr>
-        <p:spPr>
-          <a:xfrm>
-            <a:off x="6755130" y="1633061"/>
-            <a:ext cx="113157" cy="32794"/>
-          </a:xfrm>
-          <a:prstGeom prst="line">
-            <a:avLst/>
-          </a:prstGeom>
-          <a:ln w="25400">
-            <a:solidFill>
-              <a:srgbClr val="8EDBD4"/>
-            </a:solidFill>
-          </a:ln>
-          <a:effectLst/>
-        </p:spPr>
-      </p:cxnSp>
-      <p:cxnSp>
-        <p:nvCxnSpPr>
-          <p:cNvPr id="56" name="C3-E10 line 54" descr="sci-ppt:o054"/>
-          <p:cNvCxnSpPr/>
-          <p:nvPr/>
-        </p:nvCxnSpPr>
-        <p:spPr>
-          <a:xfrm>
-            <a:off x="6868287" y="1665855"/>
-            <a:ext cx="113157" cy="34106"/>
-          </a:xfrm>
-          <a:prstGeom prst="line">
-            <a:avLst/>
-          </a:prstGeom>
-          <a:ln w="25400">
-            <a:solidFill>
-              <a:srgbClr val="8EDBD4"/>
-            </a:solidFill>
-          </a:ln>
-          <a:effectLst/>
-        </p:spPr>
-      </p:cxnSp>
-      <p:cxnSp>
-        <p:nvCxnSpPr>
-          <p:cNvPr id="57" name="C3-E10 line 55" descr="sci-ppt:o055"/>
-          <p:cNvCxnSpPr/>
-          <p:nvPr/>
-        </p:nvCxnSpPr>
-        <p:spPr>
-          <a:xfrm>
-            <a:off x="6981444" y="1699961"/>
-            <a:ext cx="113157" cy="35443"/>
-          </a:xfrm>
-          <a:prstGeom prst="line">
-            <a:avLst/>
-          </a:prstGeom>
-          <a:ln w="25400">
-            <a:solidFill>
-              <a:srgbClr val="8EDBD4"/>
-            </a:solidFill>
-          </a:ln>
-          <a:effectLst/>
-        </p:spPr>
-      </p:cxnSp>
-      <p:cxnSp>
-        <p:nvCxnSpPr>
-          <p:cNvPr id="58" name="C3-E10 line 56" descr="sci-ppt:o056"/>
-          <p:cNvCxnSpPr/>
-          <p:nvPr/>
-        </p:nvCxnSpPr>
-        <p:spPr>
-          <a:xfrm>
-            <a:off x="7094601" y="1735404"/>
-            <a:ext cx="113157" cy="36806"/>
-          </a:xfrm>
-          <a:prstGeom prst="line">
-            <a:avLst/>
-          </a:prstGeom>
-          <a:ln w="25400">
-            <a:solidFill>
-              <a:srgbClr val="8EDBD4"/>
-            </a:solidFill>
-          </a:ln>
-          <a:effectLst/>
-        </p:spPr>
-      </p:cxnSp>
-      <p:cxnSp>
-        <p:nvCxnSpPr>
-          <p:cNvPr id="59" name="C3-E10 line 57" descr="sci-ppt:o057"/>
-          <p:cNvCxnSpPr/>
-          <p:nvPr/>
-        </p:nvCxnSpPr>
-        <p:spPr>
-          <a:xfrm>
-            <a:off x="7207758" y="1772210"/>
-            <a:ext cx="113157" cy="38194"/>
-          </a:xfrm>
-          <a:prstGeom prst="line">
-            <a:avLst/>
-          </a:prstGeom>
-          <a:ln w="25400">
-            <a:solidFill>
-              <a:srgbClr val="8EDBD4"/>
-            </a:solidFill>
-          </a:ln>
-          <a:effectLst/>
-        </p:spPr>
-      </p:cxnSp>
-      <p:cxnSp>
-        <p:nvCxnSpPr>
-          <p:cNvPr id="60" name="C3-E10 line 58" descr="sci-ppt:o058"/>
-          <p:cNvCxnSpPr/>
-          <p:nvPr/>
-        </p:nvCxnSpPr>
-        <p:spPr>
-          <a:xfrm>
-            <a:off x="7320915" y="1810404"/>
-            <a:ext cx="113156" cy="39610"/>
-          </a:xfrm>
-          <a:prstGeom prst="line">
-            <a:avLst/>
-          </a:prstGeom>
-          <a:ln w="25400">
-            <a:solidFill>
-              <a:srgbClr val="8EDBD4"/>
-            </a:solidFill>
-          </a:ln>
-          <a:effectLst/>
-        </p:spPr>
-      </p:cxnSp>
-      <p:cxnSp>
-        <p:nvCxnSpPr>
-          <p:cNvPr id="61" name="C3-E10 line 59" descr="sci-ppt:o059"/>
-          <p:cNvCxnSpPr/>
-          <p:nvPr/>
-        </p:nvCxnSpPr>
-        <p:spPr>
-          <a:xfrm>
-            <a:off x="7434071" y="1850014"/>
-            <a:ext cx="113158" cy="41049"/>
-          </a:xfrm>
-          <a:prstGeom prst="line">
-            <a:avLst/>
-          </a:prstGeom>
-          <a:ln w="25400">
-            <a:solidFill>
-              <a:srgbClr val="8EDBD4"/>
-            </a:solidFill>
-          </a:ln>
-          <a:effectLst/>
-        </p:spPr>
-      </p:cxnSp>
-      <p:cxnSp>
-        <p:nvCxnSpPr>
-          <p:cNvPr id="62" name="C3-E10 line 60" descr="sci-ppt:o060"/>
-          <p:cNvCxnSpPr/>
-          <p:nvPr/>
-        </p:nvCxnSpPr>
-        <p:spPr>
-          <a:xfrm>
-            <a:off x="7547229" y="1891063"/>
-            <a:ext cx="113157" cy="42515"/>
-          </a:xfrm>
-          <a:prstGeom prst="line">
-            <a:avLst/>
-          </a:prstGeom>
-          <a:ln w="25400">
-            <a:solidFill>
-              <a:srgbClr val="8EDBD4"/>
-            </a:solidFill>
-          </a:ln>
-          <a:effectLst/>
-        </p:spPr>
-      </p:cxnSp>
-      <p:cxnSp>
-        <p:nvCxnSpPr>
-          <p:cNvPr id="63" name="C3-E10 line 61" descr="sci-ppt:o061"/>
-          <p:cNvCxnSpPr/>
-          <p:nvPr/>
-        </p:nvCxnSpPr>
-        <p:spPr>
-          <a:xfrm>
-            <a:off x="7660386" y="1933578"/>
-            <a:ext cx="113157" cy="44007"/>
-          </a:xfrm>
-          <a:prstGeom prst="line">
-            <a:avLst/>
-          </a:prstGeom>
-          <a:ln w="25400">
-            <a:solidFill>
-              <a:srgbClr val="8EDBD4"/>
-            </a:solidFill>
-          </a:ln>
-          <a:effectLst/>
-        </p:spPr>
-      </p:cxnSp>
-      <p:cxnSp>
-        <p:nvCxnSpPr>
-          <p:cNvPr id="64" name="C3-E10 line 62" descr="sci-ppt:o062"/>
-          <p:cNvCxnSpPr/>
-          <p:nvPr/>
-        </p:nvCxnSpPr>
-        <p:spPr>
-          <a:xfrm>
-            <a:off x="7773543" y="1977585"/>
-            <a:ext cx="113157" cy="45525"/>
-          </a:xfrm>
-          <a:prstGeom prst="line">
-            <a:avLst/>
-          </a:prstGeom>
-          <a:ln w="25400">
-            <a:solidFill>
-              <a:srgbClr val="8EDBD4"/>
-            </a:solidFill>
-          </a:ln>
-          <a:effectLst/>
-        </p:spPr>
-      </p:cxnSp>
-      <p:cxnSp>
-        <p:nvCxnSpPr>
-          <p:cNvPr id="65" name="C3-E10 line 63" descr="sci-ppt:o063"/>
-          <p:cNvCxnSpPr/>
-          <p:nvPr/>
-        </p:nvCxnSpPr>
-        <p:spPr>
-          <a:xfrm>
-            <a:off x="7886700" y="2023110"/>
-            <a:ext cx="113156" cy="47067"/>
-          </a:xfrm>
-          <a:prstGeom prst="line">
-            <a:avLst/>
-          </a:prstGeom>
-          <a:ln w="25400">
-            <a:solidFill>
-              <a:srgbClr val="8EDBD4"/>
-            </a:solidFill>
-          </a:ln>
-          <a:effectLst/>
-        </p:spPr>
-      </p:cxnSp>
-      <p:cxnSp>
-        <p:nvCxnSpPr>
-          <p:cNvPr id="66" name="C3-E10 line 64" descr="sci-ppt:o064"/>
-          <p:cNvCxnSpPr/>
-          <p:nvPr/>
-        </p:nvCxnSpPr>
-        <p:spPr>
-          <a:xfrm>
-            <a:off x="7999856" y="2070177"/>
-            <a:ext cx="113158" cy="48636"/>
-          </a:xfrm>
-          <a:prstGeom prst="line">
-            <a:avLst/>
-          </a:prstGeom>
-          <a:ln w="25400">
-            <a:solidFill>
-              <a:srgbClr val="8EDBD4"/>
-            </a:solidFill>
-          </a:ln>
-          <a:effectLst/>
-        </p:spPr>
-      </p:cxnSp>
-      <p:cxnSp>
-        <p:nvCxnSpPr>
-          <p:cNvPr id="67" name="C3-E10 line 65" descr="sci-ppt:o065"/>
-          <p:cNvCxnSpPr/>
-          <p:nvPr/>
-        </p:nvCxnSpPr>
-        <p:spPr>
-          <a:xfrm>
-            <a:off x="8113014" y="2118813"/>
-            <a:ext cx="113157" cy="50230"/>
-          </a:xfrm>
-          <a:prstGeom prst="line">
-            <a:avLst/>
-          </a:prstGeom>
-          <a:ln w="25400">
-            <a:solidFill>
-              <a:srgbClr val="8EDBD4"/>
-            </a:solidFill>
-          </a:ln>
-          <a:effectLst/>
-        </p:spPr>
-      </p:cxnSp>
-      <p:cxnSp>
-        <p:nvCxnSpPr>
-          <p:cNvPr id="68" name="C3-E10 line 66" descr="sci-ppt:o066"/>
-          <p:cNvCxnSpPr/>
-          <p:nvPr/>
-        </p:nvCxnSpPr>
-        <p:spPr>
-          <a:xfrm>
-            <a:off x="8226171" y="2169043"/>
-            <a:ext cx="113156" cy="51851"/>
-          </a:xfrm>
-          <a:prstGeom prst="line">
-            <a:avLst/>
-          </a:prstGeom>
-          <a:ln w="25400">
-            <a:solidFill>
-              <a:srgbClr val="8EDBD4"/>
-            </a:solidFill>
-          </a:ln>
-          <a:effectLst/>
-        </p:spPr>
-      </p:cxnSp>
-      <p:cxnSp>
-        <p:nvCxnSpPr>
-          <p:cNvPr id="69" name="C3-E10 line 67" descr="sci-ppt:o067"/>
-          <p:cNvCxnSpPr/>
-          <p:nvPr/>
-        </p:nvCxnSpPr>
-        <p:spPr>
-          <a:xfrm>
-            <a:off x="8339327" y="2220894"/>
-            <a:ext cx="113157" cy="53497"/>
-          </a:xfrm>
-          <a:prstGeom prst="line">
-            <a:avLst/>
-          </a:prstGeom>
-          <a:ln w="25400">
-            <a:solidFill>
-              <a:srgbClr val="8EDBD4"/>
-            </a:solidFill>
-          </a:ln>
-          <a:effectLst/>
-        </p:spPr>
-      </p:cxnSp>
-      <p:cxnSp>
-        <p:nvCxnSpPr>
-          <p:cNvPr id="70" name="C3-E10 line 68" descr="sci-ppt:o068"/>
-          <p:cNvCxnSpPr/>
-          <p:nvPr/>
-        </p:nvCxnSpPr>
-        <p:spPr>
-          <a:xfrm>
-            <a:off x="8452484" y="2274391"/>
-            <a:ext cx="113158" cy="55168"/>
-          </a:xfrm>
-          <a:prstGeom prst="line">
-            <a:avLst/>
-          </a:prstGeom>
-          <a:ln w="25400">
-            <a:solidFill>
-              <a:srgbClr val="8EDBD4"/>
-            </a:solidFill>
-          </a:ln>
-          <a:effectLst/>
-        </p:spPr>
-      </p:cxnSp>
-      <p:cxnSp>
-        <p:nvCxnSpPr>
-          <p:cNvPr id="71" name="C3-E10 line 69" descr="sci-ppt:o069"/>
-          <p:cNvCxnSpPr/>
-          <p:nvPr/>
-        </p:nvCxnSpPr>
-        <p:spPr>
-          <a:xfrm>
-            <a:off x="8565642" y="2329559"/>
-            <a:ext cx="113157" cy="56866"/>
-          </a:xfrm>
-          <a:prstGeom prst="line">
-            <a:avLst/>
-          </a:prstGeom>
-          <a:ln w="25400">
-            <a:solidFill>
-              <a:srgbClr val="8EDBD4"/>
-            </a:solidFill>
-          </a:ln>
-          <a:effectLst/>
-        </p:spPr>
-      </p:cxnSp>
-      <p:cxnSp>
-        <p:nvCxnSpPr>
-          <p:cNvPr id="72" name="C3-E10 line 70" descr="sci-ppt:o070"/>
-          <p:cNvCxnSpPr/>
-          <p:nvPr/>
-        </p:nvCxnSpPr>
-        <p:spPr>
-          <a:xfrm>
-            <a:off x="8678799" y="2386425"/>
-            <a:ext cx="113157" cy="58589"/>
-          </a:xfrm>
-          <a:prstGeom prst="line">
-            <a:avLst/>
-          </a:prstGeom>
-          <a:ln w="25400">
-            <a:solidFill>
-              <a:srgbClr val="8EDBD4"/>
-            </a:solidFill>
-          </a:ln>
-          <a:effectLst/>
-        </p:spPr>
-      </p:cxnSp>
-      <p:cxnSp>
-        <p:nvCxnSpPr>
-          <p:cNvPr id="73" name="C3-E10 line 71" descr="sci-ppt:o071"/>
-          <p:cNvCxnSpPr/>
-          <p:nvPr/>
-        </p:nvCxnSpPr>
-        <p:spPr>
-          <a:xfrm>
-            <a:off x="8791956" y="2445014"/>
-            <a:ext cx="113157" cy="60337"/>
-          </a:xfrm>
-          <a:prstGeom prst="line">
-            <a:avLst/>
-          </a:prstGeom>
-          <a:ln w="25400">
-            <a:solidFill>
-              <a:srgbClr val="8EDBD4"/>
-            </a:solidFill>
-          </a:ln>
-          <a:effectLst/>
-        </p:spPr>
-      </p:cxnSp>
-      <p:cxnSp>
-        <p:nvCxnSpPr>
-          <p:cNvPr id="74" name="C3-E10 line 72" descr="sci-ppt:o072"/>
-          <p:cNvCxnSpPr/>
-          <p:nvPr/>
-        </p:nvCxnSpPr>
-        <p:spPr>
-          <a:xfrm>
-            <a:off x="8905113" y="2505351"/>
-            <a:ext cx="113156" cy="62112"/>
-          </a:xfrm>
-          <a:prstGeom prst="line">
-            <a:avLst/>
-          </a:prstGeom>
-          <a:ln w="25400">
-            <a:solidFill>
-              <a:srgbClr val="8EDBD4"/>
-            </a:solidFill>
-          </a:ln>
-          <a:effectLst/>
-        </p:spPr>
-      </p:cxnSp>
-      <p:cxnSp>
-        <p:nvCxnSpPr>
-          <p:cNvPr id="75" name="C3-E10 line 73" descr="sci-ppt:o073"/>
-          <p:cNvCxnSpPr/>
-          <p:nvPr/>
-        </p:nvCxnSpPr>
-        <p:spPr>
-          <a:xfrm>
-            <a:off x="9018269" y="2567463"/>
-            <a:ext cx="113157" cy="63913"/>
-          </a:xfrm>
-          <a:prstGeom prst="line">
-            <a:avLst/>
-          </a:prstGeom>
-          <a:ln w="25400">
-            <a:solidFill>
-              <a:srgbClr val="8EDBD4"/>
-            </a:solidFill>
-          </a:ln>
-          <a:effectLst/>
-        </p:spPr>
-      </p:cxnSp>
-      <p:cxnSp>
-        <p:nvCxnSpPr>
-          <p:cNvPr id="76" name="C3-E10 line 74" descr="sci-ppt:o074"/>
-          <p:cNvCxnSpPr/>
-          <p:nvPr/>
-        </p:nvCxnSpPr>
-        <p:spPr>
-          <a:xfrm>
-            <a:off x="9131426" y="2631376"/>
-            <a:ext cx="113158" cy="65738"/>
-          </a:xfrm>
-          <a:prstGeom prst="line">
-            <a:avLst/>
-          </a:prstGeom>
-          <a:ln w="25400">
-            <a:solidFill>
-              <a:srgbClr val="8EDBD4"/>
-            </a:solidFill>
-          </a:ln>
-          <a:effectLst/>
-        </p:spPr>
-      </p:cxnSp>
-      <p:cxnSp>
-        <p:nvCxnSpPr>
-          <p:cNvPr id="77" name="C3-E10 line 75" descr="sci-ppt:o075"/>
-          <p:cNvCxnSpPr/>
-          <p:nvPr/>
-        </p:nvCxnSpPr>
-        <p:spPr>
-          <a:xfrm>
-            <a:off x="9244584" y="2697114"/>
-            <a:ext cx="113157" cy="67590"/>
-          </a:xfrm>
-          <a:prstGeom prst="line">
-            <a:avLst/>
-          </a:prstGeom>
-          <a:ln w="25400">
-            <a:solidFill>
-              <a:srgbClr val="8EDBD4"/>
-            </a:solidFill>
-          </a:ln>
-          <a:effectLst/>
-        </p:spPr>
-      </p:cxnSp>
-      <p:cxnSp>
-        <p:nvCxnSpPr>
-          <p:cNvPr id="78" name="C3-E10 line 76" descr="sci-ppt:o076"/>
-          <p:cNvCxnSpPr/>
-          <p:nvPr/>
-        </p:nvCxnSpPr>
-        <p:spPr>
-          <a:xfrm>
-            <a:off x="9357741" y="2764704"/>
-            <a:ext cx="113157" cy="69467"/>
-          </a:xfrm>
-          <a:prstGeom prst="line">
-            <a:avLst/>
-          </a:prstGeom>
-          <a:ln w="25400">
-            <a:solidFill>
-              <a:srgbClr val="8EDBD4"/>
-            </a:solidFill>
-          </a:ln>
-          <a:effectLst/>
-        </p:spPr>
-      </p:cxnSp>
-      <p:cxnSp>
-        <p:nvCxnSpPr>
-          <p:cNvPr id="79" name="C3-E10 line 77" descr="sci-ppt:o077"/>
-          <p:cNvCxnSpPr/>
-          <p:nvPr/>
-        </p:nvCxnSpPr>
-        <p:spPr>
-          <a:xfrm>
-            <a:off x="9470898" y="2834171"/>
-            <a:ext cx="113157" cy="71370"/>
-          </a:xfrm>
-          <a:prstGeom prst="line">
-            <a:avLst/>
-          </a:prstGeom>
-          <a:ln w="25400">
-            <a:solidFill>
-              <a:srgbClr val="8EDBD4"/>
-            </a:solidFill>
-          </a:ln>
-          <a:effectLst/>
-        </p:spPr>
-      </p:cxnSp>
-      <p:cxnSp>
-        <p:nvCxnSpPr>
-          <p:cNvPr id="80" name="C3-E10 line 78" descr="sci-ppt:o078"/>
-          <p:cNvCxnSpPr/>
-          <p:nvPr/>
-        </p:nvCxnSpPr>
-        <p:spPr>
-          <a:xfrm>
-            <a:off x="9584055" y="2905541"/>
-            <a:ext cx="113156" cy="73299"/>
-          </a:xfrm>
-          <a:prstGeom prst="line">
-            <a:avLst/>
-          </a:prstGeom>
-          <a:ln w="25400">
-            <a:solidFill>
-              <a:srgbClr val="8EDBD4"/>
-            </a:solidFill>
-          </a:ln>
-          <a:effectLst/>
-        </p:spPr>
-      </p:cxnSp>
-      <p:cxnSp>
-        <p:nvCxnSpPr>
-          <p:cNvPr id="81" name="C3-E10 line 79" descr="sci-ppt:o079"/>
-          <p:cNvCxnSpPr/>
-          <p:nvPr/>
-        </p:nvCxnSpPr>
-        <p:spPr>
-          <a:xfrm>
-            <a:off x="9697211" y="2978840"/>
-            <a:ext cx="113158" cy="75254"/>
-          </a:xfrm>
-          <a:prstGeom prst="line">
-            <a:avLst/>
-          </a:prstGeom>
-          <a:ln w="25400">
-            <a:solidFill>
-              <a:srgbClr val="8EDBD4"/>
-            </a:solidFill>
-          </a:ln>
-          <a:effectLst/>
-        </p:spPr>
-      </p:cxnSp>
-      <p:cxnSp>
-        <p:nvCxnSpPr>
-          <p:cNvPr id="82" name="C3-E10 line 80" descr="sci-ppt:o080"/>
-          <p:cNvCxnSpPr/>
-          <p:nvPr/>
-        </p:nvCxnSpPr>
-        <p:spPr>
-          <a:xfrm>
-            <a:off x="9810369" y="3054094"/>
-            <a:ext cx="113157" cy="77234"/>
-          </a:xfrm>
-          <a:prstGeom prst="line">
-            <a:avLst/>
-          </a:prstGeom>
-          <a:ln w="25400">
-            <a:solidFill>
-              <a:srgbClr val="8EDBD4"/>
-            </a:solidFill>
-          </a:ln>
-          <a:effectLst/>
-        </p:spPr>
-      </p:cxnSp>
-      <p:cxnSp>
-        <p:nvCxnSpPr>
-          <p:cNvPr id="83" name="C3-E10 line 81" descr="sci-ppt:o081"/>
-          <p:cNvCxnSpPr/>
-          <p:nvPr/>
-        </p:nvCxnSpPr>
-        <p:spPr>
-          <a:xfrm>
-            <a:off x="9923526" y="3131328"/>
-            <a:ext cx="113157" cy="79240"/>
-          </a:xfrm>
-          <a:prstGeom prst="line">
-            <a:avLst/>
-          </a:prstGeom>
-          <a:ln w="25400">
-            <a:solidFill>
-              <a:srgbClr val="8EDBD4"/>
-            </a:solidFill>
-          </a:ln>
-          <a:effectLst/>
-        </p:spPr>
-      </p:cxnSp>
-      <p:cxnSp>
-        <p:nvCxnSpPr>
-          <p:cNvPr id="84" name="C3-E10 line 82" descr="sci-ppt:o082"/>
-          <p:cNvCxnSpPr/>
-          <p:nvPr/>
-        </p:nvCxnSpPr>
-        <p:spPr>
-          <a:xfrm>
-            <a:off x="10036683" y="3210568"/>
-            <a:ext cx="113157" cy="81271"/>
-          </a:xfrm>
-          <a:prstGeom prst="line">
-            <a:avLst/>
-          </a:prstGeom>
-          <a:ln w="25400">
-            <a:solidFill>
-              <a:srgbClr val="8EDBD4"/>
-            </a:solidFill>
-          </a:ln>
-          <a:effectLst/>
-        </p:spPr>
-      </p:cxnSp>
-      <p:sp>
-        <p:nvSpPr>
-          <p:cNvPr id="85" name="C3-E10 text 83" descr="sci-ppt:o083"/>
+        <p:txBody>
+          <a:bodyPr rtlCol="0" anchor="ctr"/>
+          <a:lstStyle/>
+          <a:p>
+            <a:pPr algn="ctr"/>
+          </a:p>
+        </p:txBody>
+      </p:sp>
+      <p:sp>
+        <p:nvSpPr>
+          <p:cNvPr id="52" name="C3-E10 text 50" descr="sci-ppt:o050"/>
           <p:cNvSpPr txBox="1"/>
           <p:nvPr/>
         </p:nvSpPr>
         <p:spPr>
           <a:xfrm>
-            <a:off x="365760" y="594360"/>
-            <a:ext cx="2743200" cy="365760"/>
+            <a:off x="914400" y="5733288"/>
+            <a:ext cx="10972800" cy="239395"/>
           </a:xfrm>
           <a:prstGeom prst="rect">
             <a:avLst/>
@@ -4962,7 +4817,7 @@
           <a:effectLst/>
         </p:spPr>
         <p:txBody>
-          <a:bodyPr wrap="square" lIns="27432" rIns="27432" tIns="18288" bIns="18288" anchor="ctr">
+          <a:bodyPr wrap="none" lIns="18288" rIns="18288" tIns="18288" bIns="18288" anchor="t">
             <a:spAutoFit/>
           </a:bodyPr>
           <a:lstStyle/>
@@ -4973,27 +4828,27 @@
               </a:spcAft>
             </a:pPr>
             <a:r>
-              <a:rPr sz="1800" b="0" i="0">
+              <a:rPr sz="1250" b="0" i="0">
                 <a:solidFill>
                   <a:srgbClr val="E7F0F3"/>
                 </a:solidFill>
                 <a:latin typeface="Arial"/>
               </a:rPr>
-              <a:t>R/R_max</a:t>
-            </a:r>
-          </a:p>
-        </p:txBody>
-      </p:sp>
-      <p:sp>
-        <p:nvSpPr>
-          <p:cNvPr id="86" name="C3-E10 text 84" descr="sci-ppt:o084"/>
+              <a:t>Time to collapse t_c = Rₘₐₓ √(ρ/Δp_c) C(χ): shared liquid inertia makes every bubble slower, never faster.</a:t>
+            </a:r>
+          </a:p>
+        </p:txBody>
+      </p:sp>
+      <p:sp>
+        <p:nvSpPr>
+          <p:cNvPr id="53" name="C3-E10 text 51" descr="sci-ppt:o051"/>
           <p:cNvSpPr txBox="1"/>
           <p:nvPr/>
         </p:nvSpPr>
         <p:spPr>
           <a:xfrm>
-            <a:off x="9784080" y="3474720"/>
-            <a:ext cx="1828800" cy="274320"/>
+            <a:off x="320040" y="6510528"/>
+            <a:ext cx="11521440" cy="200660"/>
           </a:xfrm>
           <a:prstGeom prst="rect">
             <a:avLst/>
@@ -5002,445 +4857,7 @@
           <a:effectLst/>
         </p:spPr>
         <p:txBody>
-          <a:bodyPr wrap="square" lIns="27432" rIns="27432" tIns="18288" bIns="18288" anchor="ctr">
-            <a:spAutoFit/>
-          </a:bodyPr>
-          <a:lstStyle/>
-          <a:p>
-            <a:pPr algn="l">
-              <a:spcAft>
-                <a:spcPts val="0"/>
-              </a:spcAft>
-            </a:pPr>
-            <a:r>
-              <a:rPr sz="1800" b="0" i="0">
-                <a:solidFill>
-                  <a:srgbClr val="E7F0F3"/>
-                </a:solidFill>
-                <a:latin typeface="Arial"/>
-              </a:rPr>
-              <a:t>t/t_c</a:t>
-            </a:r>
-          </a:p>
-        </p:txBody>
-      </p:sp>
-      <p:sp>
-        <p:nvSpPr>
-          <p:cNvPr id="87" name="C3-E10 text 85" descr="sci-ppt:o085"/>
-          <p:cNvSpPr txBox="1"/>
-          <p:nvPr/>
-        </p:nvSpPr>
-        <p:spPr>
-          <a:xfrm>
-            <a:off x="2743200" y="2057400"/>
-            <a:ext cx="6858000" cy="640080"/>
-          </a:xfrm>
-          <a:prstGeom prst="rect">
-            <a:avLst/>
-          </a:prstGeom>
-          <a:noFill/>
-          <a:effectLst/>
-        </p:spPr>
-        <p:txBody>
-          <a:bodyPr wrap="square" lIns="27432" rIns="27432" tIns="18288" bIns="18288" anchor="ctr">
-            <a:spAutoFit/>
-          </a:bodyPr>
-          <a:lstStyle/>
-          <a:p>
-            <a:pPr algn="l">
-              <a:spcAft>
-                <a:spcPts val="0"/>
-              </a:spcAft>
-            </a:pPr>
-            <a:r>
-              <a:rPr sz="1800" b="0" i="0">
-                <a:solidFill>
-                  <a:srgbClr val="E7F0F3"/>
-                </a:solidFill>
-                <a:latin typeface="Arial"/>
-              </a:rPr>
-              <a:t>Initial radius R_max; initial speed zero.</a:t>
-            </a:r>
-          </a:p>
-          <a:p>
-            <a:pPr algn="l">
-              <a:spcAft>
-                <a:spcPts val="0"/>
-              </a:spcAft>
-            </a:pPr>
-            <a:r>
-              <a:rPr sz="1800" b="0" i="0">
-                <a:solidFill>
-                  <a:srgbClr val="E7F0F3"/>
-                </a:solidFill>
-                <a:latin typeface="Arial"/>
-              </a:rPr>
-              <a:t>Formal endpoint R → 0.</a:t>
-            </a:r>
-          </a:p>
-        </p:txBody>
-      </p:sp>
-      <p:cxnSp>
-        <p:nvCxnSpPr>
-          <p:cNvPr id="88" name="C3-E10 line 86" descr="sci-ppt:o086"/>
-          <p:cNvCxnSpPr/>
-          <p:nvPr/>
-        </p:nvCxnSpPr>
-        <p:spPr>
-          <a:xfrm>
-            <a:off x="274320" y="3977639"/>
-            <a:ext cx="11612880" cy="0"/>
-          </a:xfrm>
-          <a:prstGeom prst="line">
-            <a:avLst/>
-          </a:prstGeom>
-          <a:ln w="12700">
-            <a:solidFill>
-              <a:srgbClr val="405967"/>
-            </a:solidFill>
-          </a:ln>
-          <a:effectLst/>
-        </p:spPr>
-      </p:cxnSp>
-      <p:sp>
-        <p:nvSpPr>
-          <p:cNvPr id="89" name="C3-E10 text 87" descr="sci-ppt:o087"/>
-          <p:cNvSpPr txBox="1"/>
-          <p:nvPr/>
-        </p:nvSpPr>
-        <p:spPr>
-          <a:xfrm>
-            <a:off x="320040" y="4096512"/>
-            <a:ext cx="5715000" cy="246888"/>
-          </a:xfrm>
-          <a:prstGeom prst="rect">
-            <a:avLst/>
-          </a:prstGeom>
-          <a:noFill/>
-          <a:effectLst/>
-        </p:spPr>
-        <p:txBody>
-          <a:bodyPr wrap="square" lIns="27432" rIns="27432" tIns="18288" bIns="18288" anchor="ctr">
-            <a:spAutoFit/>
-          </a:bodyPr>
-          <a:lstStyle/>
-          <a:p>
-            <a:pPr algn="l">
-              <a:spcAft>
-                <a:spcPts val="0"/>
-              </a:spcAft>
-            </a:pPr>
-            <a:r>
-              <a:rPr sz="1150" b="0" i="0">
-                <a:solidFill>
-                  <a:srgbClr val="B4C7D2"/>
-                </a:solidFill>
-                <a:latin typeface="Arial"/>
-              </a:rPr>
-              <a:t>• t_c radial event time</a:t>
-            </a:r>
-          </a:p>
-        </p:txBody>
-      </p:sp>
-      <p:sp>
-        <p:nvSpPr>
-          <p:cNvPr id="90" name="C3-E10 text 88" descr="sci-ppt:o088"/>
-          <p:cNvSpPr txBox="1"/>
-          <p:nvPr/>
-        </p:nvSpPr>
-        <p:spPr>
-          <a:xfrm>
-            <a:off x="6217920" y="4096512"/>
-            <a:ext cx="5715000" cy="246888"/>
-          </a:xfrm>
-          <a:prstGeom prst="rect">
-            <a:avLst/>
-          </a:prstGeom>
-          <a:noFill/>
-          <a:effectLst/>
-        </p:spPr>
-        <p:txBody>
-          <a:bodyPr wrap="square" lIns="27432" rIns="27432" tIns="18288" bIns="18288" anchor="ctr">
-            <a:spAutoFit/>
-          </a:bodyPr>
-          <a:lstStyle/>
-          <a:p>
-            <a:pPr algn="l">
-              <a:spcAft>
-                <a:spcPts val="0"/>
-              </a:spcAft>
-            </a:pPr>
-            <a:r>
-              <a:rPr sz="1150" b="0" i="0">
-                <a:solidFill>
-                  <a:srgbClr val="B4C7D2"/>
-                </a:solidFill>
-                <a:latin typeface="Arial"/>
-              </a:rPr>
-              <a:t>• R_max, R; x = R/R_max</a:t>
-            </a:r>
-          </a:p>
-        </p:txBody>
-      </p:sp>
-      <p:sp>
-        <p:nvSpPr>
-          <p:cNvPr id="91" name="C3-E10 text 89" descr="sci-ppt:o089"/>
-          <p:cNvSpPr txBox="1"/>
-          <p:nvPr/>
-        </p:nvSpPr>
-        <p:spPr>
-          <a:xfrm>
-            <a:off x="320040" y="4329684"/>
-            <a:ext cx="5715000" cy="246888"/>
-          </a:xfrm>
-          <a:prstGeom prst="rect">
-            <a:avLst/>
-          </a:prstGeom>
-          <a:noFill/>
-          <a:effectLst/>
-        </p:spPr>
-        <p:txBody>
-          <a:bodyPr wrap="square" lIns="27432" rIns="27432" tIns="18288" bIns="18288" anchor="ctr">
-            <a:spAutoFit/>
-          </a:bodyPr>
-          <a:lstStyle/>
-          <a:p>
-            <a:pPr algn="l">
-              <a:spcAft>
-                <a:spcPts val="0"/>
-              </a:spcAft>
-            </a:pPr>
-            <a:r>
-              <a:rPr sz="1150" b="0" i="0">
-                <a:solidFill>
-                  <a:srgbClr val="B4C7D2"/>
-                </a:solidFill>
-                <a:latin typeface="Arial"/>
-              </a:rPr>
-              <a:t>• χ = S R_max</a:t>
-            </a:r>
-          </a:p>
-        </p:txBody>
-      </p:sp>
-      <p:sp>
-        <p:nvSpPr>
-          <p:cNvPr id="92" name="C3-E10 text 90" descr="sci-ppt:o090"/>
-          <p:cNvSpPr txBox="1"/>
-          <p:nvPr/>
-        </p:nvSpPr>
-        <p:spPr>
-          <a:xfrm>
-            <a:off x="6217920" y="4329684"/>
-            <a:ext cx="5715000" cy="246888"/>
-          </a:xfrm>
-          <a:prstGeom prst="rect">
-            <a:avLst/>
-          </a:prstGeom>
-          <a:noFill/>
-          <a:effectLst/>
-        </p:spPr>
-        <p:txBody>
-          <a:bodyPr wrap="square" lIns="27432" rIns="27432" tIns="18288" bIns="18288" anchor="ctr">
-            <a:spAutoFit/>
-          </a:bodyPr>
-          <a:lstStyle/>
-          <a:p>
-            <a:pPr algn="l">
-              <a:spcAft>
-                <a:spcPts val="0"/>
-              </a:spcAft>
-            </a:pPr>
-            <a:r>
-              <a:rPr sz="1150" b="0" i="0">
-                <a:solidFill>
-                  <a:srgbClr val="B4C7D2"/>
-                </a:solidFill>
-                <a:latin typeface="Arial"/>
-              </a:rPr>
-              <a:t>• C(χ), C′(χ) &gt; 0</a:t>
-            </a:r>
-          </a:p>
-        </p:txBody>
-      </p:sp>
-      <p:sp>
-        <p:nvSpPr>
-          <p:cNvPr id="93" name="C3-E10 text 91" descr="sci-ppt:o091"/>
-          <p:cNvSpPr txBox="1"/>
-          <p:nvPr/>
-        </p:nvSpPr>
-        <p:spPr>
-          <a:xfrm>
-            <a:off x="320040" y="4562856"/>
-            <a:ext cx="5715000" cy="246888"/>
-          </a:xfrm>
-          <a:prstGeom prst="rect">
-            <a:avLst/>
-          </a:prstGeom>
-          <a:noFill/>
-          <a:effectLst/>
-        </p:spPr>
-        <p:txBody>
-          <a:bodyPr wrap="square" lIns="27432" rIns="27432" tIns="18288" bIns="18288" anchor="ctr">
-            <a:spAutoFit/>
-          </a:bodyPr>
-          <a:lstStyle/>
-          <a:p>
-            <a:pPr algn="l">
-              <a:spcAft>
-                <a:spcPts val="0"/>
-              </a:spcAft>
-            </a:pPr>
-            <a:r>
-              <a:rPr sz="1150" b="0" i="0">
-                <a:solidFill>
-                  <a:srgbClr val="B4C7D2"/>
-                </a:solidFill>
-                <a:latin typeface="Arial"/>
-              </a:rPr>
-              <a:t>• ρ / Δp_c sets time scale</a:t>
-            </a:r>
-          </a:p>
-        </p:txBody>
-      </p:sp>
-      <p:sp>
-        <p:nvSpPr>
-          <p:cNvPr id="94" name="C3-E10 text 92" descr="sci-ppt:o092"/>
-          <p:cNvSpPr txBox="1"/>
-          <p:nvPr/>
-        </p:nvSpPr>
-        <p:spPr>
-          <a:xfrm>
-            <a:off x="6217920" y="4562856"/>
-            <a:ext cx="5715000" cy="246888"/>
-          </a:xfrm>
-          <a:prstGeom prst="rect">
-            <a:avLst/>
-          </a:prstGeom>
-          <a:noFill/>
-          <a:effectLst/>
-        </p:spPr>
-        <p:txBody>
-          <a:bodyPr wrap="square" lIns="27432" rIns="27432" tIns="18288" bIns="18288" anchor="ctr">
-            <a:spAutoFit/>
-          </a:bodyPr>
-          <a:lstStyle/>
-          <a:p>
-            <a:pPr algn="l">
-              <a:spcAft>
-                <a:spcPts val="0"/>
-              </a:spcAft>
-            </a:pPr>
-            <a:r>
-              <a:rPr sz="1150" b="0" i="0">
-                <a:solidFill>
-                  <a:srgbClr val="B4C7D2"/>
-                </a:solidFill>
-                <a:latin typeface="Arial"/>
-              </a:rPr>
-              <a:t>• Ṙ inward speed; |Ṙ| positive</a:t>
-            </a:r>
-          </a:p>
-        </p:txBody>
-      </p:sp>
-      <p:sp>
-        <p:nvSpPr>
-          <p:cNvPr id="95" name="C3-E10 text 93" descr="sci-ppt:o093"/>
-          <p:cNvSpPr txBox="1"/>
-          <p:nvPr/>
-        </p:nvSpPr>
-        <p:spPr>
-          <a:xfrm>
-            <a:off x="320040" y="5596128"/>
-            <a:ext cx="11430000" cy="292608"/>
-          </a:xfrm>
-          <a:prstGeom prst="rect">
-            <a:avLst/>
-          </a:prstGeom>
-          <a:noFill/>
-          <a:effectLst/>
-        </p:spPr>
-        <p:txBody>
-          <a:bodyPr wrap="square" lIns="27432" rIns="27432" tIns="18288" bIns="18288" anchor="ctr">
-            <a:spAutoFit/>
-          </a:bodyPr>
-          <a:lstStyle/>
-          <a:p>
-            <a:pPr algn="l">
-              <a:spcAft>
-                <a:spcPts val="0"/>
-              </a:spcAft>
-            </a:pPr>
-            <a:r>
-              <a:rPr sz="1150" b="0" i="0">
-                <a:solidFill>
-                  <a:srgbClr val="8EDBD4"/>
-                </a:solidFill>
-                <a:latin typeface="Arial"/>
-              </a:rPr>
-              <a:t>x = 1 endpoint behaves as (1 − x)^−1/2</a:t>
-            </a:r>
-          </a:p>
-        </p:txBody>
-      </p:sp>
-      <p:sp>
-        <p:nvSpPr>
-          <p:cNvPr id="96" name="C3-E10 text 94" descr="sci-ppt:o094"/>
-          <p:cNvSpPr txBox="1"/>
-          <p:nvPr/>
-        </p:nvSpPr>
-        <p:spPr>
-          <a:xfrm>
-            <a:off x="320040" y="5870448"/>
-            <a:ext cx="11430000" cy="292608"/>
-          </a:xfrm>
-          <a:prstGeom prst="rect">
-            <a:avLst/>
-          </a:prstGeom>
-          <a:noFill/>
-          <a:effectLst/>
-        </p:spPr>
-        <p:txBody>
-          <a:bodyPr wrap="square" lIns="27432" rIns="27432" tIns="18288" bIns="18288" anchor="ctr">
-            <a:spAutoFit/>
-          </a:bodyPr>
-          <a:lstStyle/>
-          <a:p>
-            <a:pPr algn="l">
-              <a:spcAft>
-                <a:spcPts val="0"/>
-              </a:spcAft>
-            </a:pPr>
-            <a:r>
-              <a:rPr sz="1150" b="0" i="0">
-                <a:solidFill>
-                  <a:srgbClr val="8EDBD4"/>
-                </a:solidFill>
-                <a:latin typeface="Arial"/>
-              </a:rPr>
-              <a:t>χ = 0 recovers the Rayleigh coefficient</a:t>
-            </a:r>
-          </a:p>
-        </p:txBody>
-      </p:sp>
-      <p:sp>
-        <p:nvSpPr>
-          <p:cNvPr id="97" name="C3-E10 text 95" descr="sci-ppt:o095"/>
-          <p:cNvSpPr txBox="1"/>
-          <p:nvPr/>
-        </p:nvSpPr>
-        <p:spPr>
-          <a:xfrm>
-            <a:off x="320040" y="6473952"/>
-            <a:ext cx="11430000" cy="256032"/>
-          </a:xfrm>
-          <a:prstGeom prst="rect">
-            <a:avLst/>
-          </a:prstGeom>
-          <a:noFill/>
-          <a:effectLst/>
-        </p:spPr>
-        <p:txBody>
-          <a:bodyPr wrap="square" lIns="27432" rIns="27432" tIns="18288" bIns="18288" anchor="ctr">
+          <a:bodyPr wrap="none" lIns="18288" rIns="18288" tIns="18288" bIns="18288" anchor="t">
             <a:spAutoFit/>
           </a:bodyPr>
           <a:lstStyle/>
@@ -5457,7 +4874,7 @@
                 </a:solidFill>
                 <a:latin typeface="Arial"/>
               </a:rPr>
-              <a:t>Model schematic; geometry is not to scale.</a:t>
+              <a:t>Collapse-time quadrature and sign check of Eq. C3-E10.</a:t>
             </a:r>
           </a:p>
         </p:txBody>
